--- a/.lessons/54 Slider Features/9 Slider- Delete slider feature/1.pptx
+++ b/.lessons/54 Slider Features/9 Slider- Delete slider feature/1.pptx
@@ -6,8 +6,19 @@
   </p:sldMasterIdLst>
   <p:sldIdLst>
     <p:sldId id="413" r:id="rId2"/>
-    <p:sldId id="414" r:id="rId3"/>
-    <p:sldId id="400" r:id="rId4"/>
+    <p:sldId id="415" r:id="rId3"/>
+    <p:sldId id="416" r:id="rId4"/>
+    <p:sldId id="417" r:id="rId5"/>
+    <p:sldId id="418" r:id="rId6"/>
+    <p:sldId id="419" r:id="rId7"/>
+    <p:sldId id="420" r:id="rId8"/>
+    <p:sldId id="421" r:id="rId9"/>
+    <p:sldId id="422" r:id="rId10"/>
+    <p:sldId id="414" r:id="rId11"/>
+    <p:sldId id="400" r:id="rId12"/>
+    <p:sldId id="423" r:id="rId13"/>
+    <p:sldId id="424" r:id="rId14"/>
+    <p:sldId id="425" r:id="rId15"/>
   </p:sldIdLst>
   <p:sldSz cx="12192000" cy="6858000"/>
   <p:notesSz cx="6858000" cy="9144000"/>
@@ -261,7 +272,7 @@
           <a:p>
             <a:fld id="{3E102D2E-813C-461C-9963-687A650C48C0}" type="datetimeFigureOut">
               <a:rPr lang="en-US" smtClean="0"/>
-              <a:t>6/26/2025</a:t>
+              <a:t>8/9/2025</a:t>
             </a:fld>
             <a:endParaRPr lang="en-US"/>
           </a:p>
@@ -459,7 +470,7 @@
           <a:p>
             <a:fld id="{3E102D2E-813C-461C-9963-687A650C48C0}" type="datetimeFigureOut">
               <a:rPr lang="en-US" smtClean="0"/>
-              <a:t>6/26/2025</a:t>
+              <a:t>8/9/2025</a:t>
             </a:fld>
             <a:endParaRPr lang="en-US"/>
           </a:p>
@@ -667,7 +678,7 @@
           <a:p>
             <a:fld id="{3E102D2E-813C-461C-9963-687A650C48C0}" type="datetimeFigureOut">
               <a:rPr lang="en-US" smtClean="0"/>
-              <a:t>6/26/2025</a:t>
+              <a:t>8/9/2025</a:t>
             </a:fld>
             <a:endParaRPr lang="en-US"/>
           </a:p>
@@ -865,7 +876,7 @@
           <a:p>
             <a:fld id="{3E102D2E-813C-461C-9963-687A650C48C0}" type="datetimeFigureOut">
               <a:rPr lang="en-US" smtClean="0"/>
-              <a:t>6/26/2025</a:t>
+              <a:t>8/9/2025</a:t>
             </a:fld>
             <a:endParaRPr lang="en-US"/>
           </a:p>
@@ -1140,7 +1151,7 @@
           <a:p>
             <a:fld id="{3E102D2E-813C-461C-9963-687A650C48C0}" type="datetimeFigureOut">
               <a:rPr lang="en-US" smtClean="0"/>
-              <a:t>6/26/2025</a:t>
+              <a:t>8/9/2025</a:t>
             </a:fld>
             <a:endParaRPr lang="en-US"/>
           </a:p>
@@ -1405,7 +1416,7 @@
           <a:p>
             <a:fld id="{3E102D2E-813C-461C-9963-687A650C48C0}" type="datetimeFigureOut">
               <a:rPr lang="en-US" smtClean="0"/>
-              <a:t>6/26/2025</a:t>
+              <a:t>8/9/2025</a:t>
             </a:fld>
             <a:endParaRPr lang="en-US"/>
           </a:p>
@@ -1817,7 +1828,7 @@
           <a:p>
             <a:fld id="{3E102D2E-813C-461C-9963-687A650C48C0}" type="datetimeFigureOut">
               <a:rPr lang="en-US" smtClean="0"/>
-              <a:t>6/26/2025</a:t>
+              <a:t>8/9/2025</a:t>
             </a:fld>
             <a:endParaRPr lang="en-US"/>
           </a:p>
@@ -1958,7 +1969,7 @@
           <a:p>
             <a:fld id="{3E102D2E-813C-461C-9963-687A650C48C0}" type="datetimeFigureOut">
               <a:rPr lang="en-US" smtClean="0"/>
-              <a:t>6/26/2025</a:t>
+              <a:t>8/9/2025</a:t>
             </a:fld>
             <a:endParaRPr lang="en-US"/>
           </a:p>
@@ -2071,7 +2082,7 @@
           <a:p>
             <a:fld id="{3E102D2E-813C-461C-9963-687A650C48C0}" type="datetimeFigureOut">
               <a:rPr lang="en-US" smtClean="0"/>
-              <a:t>6/26/2025</a:t>
+              <a:t>8/9/2025</a:t>
             </a:fld>
             <a:endParaRPr lang="en-US"/>
           </a:p>
@@ -2382,7 +2393,7 @@
           <a:p>
             <a:fld id="{3E102D2E-813C-461C-9963-687A650C48C0}" type="datetimeFigureOut">
               <a:rPr lang="en-US" smtClean="0"/>
-              <a:t>6/26/2025</a:t>
+              <a:t>8/9/2025</a:t>
             </a:fld>
             <a:endParaRPr lang="en-US"/>
           </a:p>
@@ -2670,7 +2681,7 @@
           <a:p>
             <a:fld id="{3E102D2E-813C-461C-9963-687A650C48C0}" type="datetimeFigureOut">
               <a:rPr lang="en-US" smtClean="0"/>
-              <a:t>6/26/2025</a:t>
+              <a:t>8/9/2025</a:t>
             </a:fld>
             <a:endParaRPr lang="en-US"/>
           </a:p>
@@ -2911,7 +2922,7 @@
           <a:p>
             <a:fld id="{3E102D2E-813C-461C-9963-687A650C48C0}" type="datetimeFigureOut">
               <a:rPr lang="en-US" smtClean="0"/>
-              <a:t>6/26/2025</a:t>
+              <a:t>8/9/2025</a:t>
             </a:fld>
             <a:endParaRPr lang="en-US"/>
           </a:p>
@@ -3349,7 +3360,7 @@
         <p:spPr>
           <a:xfrm>
             <a:off x="217714" y="255046"/>
-            <a:ext cx="11756571" cy="355354"/>
+            <a:ext cx="11756571" cy="1555682"/>
           </a:xfrm>
           <a:prstGeom prst="rect">
             <a:avLst/>
@@ -3369,21 +3380,252 @@
               <a:buNone/>
             </a:pPr>
             <a:r>
-              <a:rPr kumimoji="0" lang="en-US" altLang="en-US" sz="1300" b="0" i="0" u="none" strike="noStrike" cap="none" normalizeH="0" baseline="0">
-                <a:ln>
-                  <a:noFill/>
-                </a:ln>
+              <a:rPr lang="az-Latn-AZ" altLang="en-US" sz="1300" b="1" u="sng">
                 <a:solidFill>
-                  <a:schemeClr val="tx1"/>
+                  <a:srgbClr val="0070C0"/>
                 </a:solidFill>
-                <a:effectLst/>
-                <a:latin typeface="Arial" panose="020B0604020202020204" pitchFamily="34" charset="0"/>
-              </a:rPr>
-              <a:t>.</a:t>
-            </a:r>
-          </a:p>
-        </p:txBody>
-      </p:sp>
+                <a:latin typeface="Arial" panose="020B0604020202020204" pitchFamily="34" charset="0"/>
+              </a:rPr>
+              <a:t>https://sweetalert2.github.io/#examples</a:t>
+            </a:r>
+            <a:r>
+              <a:rPr lang="az-Latn-AZ" altLang="en-US" sz="1300">
+                <a:latin typeface="Arial" panose="020B0604020202020204" pitchFamily="34" charset="0"/>
+              </a:rPr>
+              <a:t>   -   İndi, </a:t>
+            </a:r>
+            <a:r>
+              <a:rPr lang="az-Latn-AZ" altLang="en-US" sz="1300" b="1">
+                <a:latin typeface="Arial" panose="020B0604020202020204" pitchFamily="34" charset="0"/>
+              </a:rPr>
+              <a:t>Slider</a:t>
+            </a:r>
+            <a:r>
+              <a:rPr lang="az-Latn-AZ" altLang="en-US" sz="1300">
+                <a:latin typeface="Arial" panose="020B0604020202020204" pitchFamily="34" charset="0"/>
+              </a:rPr>
+              <a:t> üçün </a:t>
+            </a:r>
+            <a:r>
+              <a:rPr lang="az-Latn-AZ" altLang="en-US" sz="1300" b="1">
+                <a:latin typeface="Arial" panose="020B0604020202020204" pitchFamily="34" charset="0"/>
+              </a:rPr>
+              <a:t>delete</a:t>
+            </a:r>
+            <a:r>
+              <a:rPr lang="az-Latn-AZ" altLang="en-US" sz="1300">
+                <a:latin typeface="Arial" panose="020B0604020202020204" pitchFamily="34" charset="0"/>
+              </a:rPr>
+              <a:t> düyməsini konfiqurasiya edəcəyik. Ancaq ilk olaraq, </a:t>
+            </a:r>
+            <a:r>
+              <a:rPr lang="en-US" altLang="en-US" sz="1300">
+                <a:latin typeface="Arial" panose="020B0604020202020204" pitchFamily="34" charset="0"/>
+              </a:rPr>
+              <a:t>`</a:t>
+            </a:r>
+            <a:r>
+              <a:rPr lang="en-US" altLang="en-US" sz="1300" b="1">
+                <a:latin typeface="Arial" panose="020B0604020202020204" pitchFamily="34" charset="0"/>
+              </a:rPr>
+              <a:t>sweetalert2</a:t>
+            </a:r>
+            <a:r>
+              <a:rPr lang="en-US" altLang="en-US" sz="1300">
+                <a:latin typeface="Arial" panose="020B0604020202020204" pitchFamily="34" charset="0"/>
+              </a:rPr>
+              <a:t>` </a:t>
+            </a:r>
+            <a:r>
+              <a:rPr lang="az-Latn-AZ" altLang="en-US" sz="1300">
+                <a:latin typeface="Arial" panose="020B0604020202020204" pitchFamily="34" charset="0"/>
+              </a:rPr>
+              <a:t>adında bir saytda daxil olaraq, </a:t>
+            </a:r>
+            <a:r>
+              <a:rPr lang="az-Latn-AZ" altLang="en-US" sz="1300" b="1">
+                <a:latin typeface="Arial" panose="020B0604020202020204" pitchFamily="34" charset="0"/>
+              </a:rPr>
+              <a:t>script</a:t>
+            </a:r>
+            <a:r>
+              <a:rPr lang="az-Latn-AZ" altLang="en-US" sz="1300">
+                <a:latin typeface="Arial" panose="020B0604020202020204" pitchFamily="34" charset="0"/>
+              </a:rPr>
+              <a:t> taginin </a:t>
+            </a:r>
+            <a:r>
+              <a:rPr lang="az-Latn-AZ" altLang="en-US" sz="1300" b="1">
+                <a:latin typeface="Arial" panose="020B0604020202020204" pitchFamily="34" charset="0"/>
+              </a:rPr>
+              <a:t>cdn</a:t>
+            </a:r>
+            <a:r>
+              <a:rPr lang="az-Latn-AZ" altLang="en-US" sz="1300">
+                <a:latin typeface="Arial" panose="020B0604020202020204" pitchFamily="34" charset="0"/>
+              </a:rPr>
+              <a:t> linkini götürürük və `</a:t>
+            </a:r>
+            <a:r>
+              <a:rPr lang="en-US" altLang="en-US" sz="1300" b="1">
+                <a:latin typeface="Arial" panose="020B0604020202020204" pitchFamily="34" charset="0"/>
+              </a:rPr>
+              <a:t>resources\views\admin\layouts\master.blade.php</a:t>
+            </a:r>
+            <a:r>
+              <a:rPr lang="az-Latn-AZ" altLang="en-US" sz="1300">
+                <a:latin typeface="Arial" panose="020B0604020202020204" pitchFamily="34" charset="0"/>
+              </a:rPr>
+              <a:t>` faylına yerləşdiririk. Bu paket sayəsində gözəl </a:t>
+            </a:r>
+            <a:r>
+              <a:rPr lang="az-Latn-AZ" altLang="en-US" sz="1300" b="1">
+                <a:latin typeface="Arial" panose="020B0604020202020204" pitchFamily="34" charset="0"/>
+              </a:rPr>
+              <a:t>modal</a:t>
+            </a:r>
+            <a:r>
+              <a:rPr lang="az-Latn-AZ" altLang="en-US" sz="1300">
+                <a:latin typeface="Arial" panose="020B0604020202020204" pitchFamily="34" charset="0"/>
+              </a:rPr>
+              <a:t> pəncərələr göstərə bilərik. </a:t>
+            </a:r>
+          </a:p>
+          <a:p>
+            <a:pPr>
+              <a:lnSpc>
+                <a:spcPct val="150000"/>
+              </a:lnSpc>
+              <a:buNone/>
+            </a:pPr>
+            <a:endParaRPr lang="az-Latn-AZ" altLang="en-US" sz="1300">
+              <a:latin typeface="Arial" panose="020B0604020202020204" pitchFamily="34" charset="0"/>
+            </a:endParaRPr>
+          </a:p>
+          <a:p>
+            <a:pPr>
+              <a:lnSpc>
+                <a:spcPct val="150000"/>
+              </a:lnSpc>
+              <a:buNone/>
+            </a:pPr>
+            <a:r>
+              <a:rPr lang="az-Latn-AZ" altLang="en-US" sz="1300">
+                <a:latin typeface="Arial" panose="020B0604020202020204" pitchFamily="34" charset="0"/>
+              </a:rPr>
+              <a:t>Məsələn, </a:t>
+            </a:r>
+            <a:r>
+              <a:rPr lang="az-Latn-AZ" altLang="en-US" sz="1300" b="1">
+                <a:latin typeface="Arial" panose="020B0604020202020204" pitchFamily="34" charset="0"/>
+              </a:rPr>
+              <a:t>delete</a:t>
+            </a:r>
+            <a:r>
+              <a:rPr lang="az-Latn-AZ" altLang="en-US" sz="1300">
+                <a:latin typeface="Arial" panose="020B0604020202020204" pitchFamily="34" charset="0"/>
+              </a:rPr>
+              <a:t> düyməsini kliklədikdə, </a:t>
+            </a:r>
+            <a:r>
+              <a:rPr lang="az-Latn-AZ" altLang="en-US" sz="1300" b="1">
+                <a:latin typeface="Arial" panose="020B0604020202020204" pitchFamily="34" charset="0"/>
+              </a:rPr>
+              <a:t>modal</a:t>
+            </a:r>
+            <a:r>
+              <a:rPr lang="az-Latn-AZ" altLang="en-US" sz="1300">
+                <a:latin typeface="Arial" panose="020B0604020202020204" pitchFamily="34" charset="0"/>
+              </a:rPr>
+              <a:t> (pop-up) pəncərə açılır və mövcud postu silmək istəyib-istəməyəcəyimizi soruşur. </a:t>
+            </a:r>
+            <a:endParaRPr kumimoji="0" lang="en-US" altLang="en-US" sz="1300" b="0" i="0" u="none" strike="noStrike" cap="none" normalizeH="0" baseline="0">
+              <a:ln>
+                <a:noFill/>
+              </a:ln>
+              <a:solidFill>
+                <a:schemeClr val="tx1"/>
+              </a:solidFill>
+              <a:effectLst/>
+              <a:latin typeface="Arial" panose="020B0604020202020204" pitchFamily="34" charset="0"/>
+            </a:endParaRPr>
+          </a:p>
+        </p:txBody>
+      </p:sp>
+      <p:pic>
+        <p:nvPicPr>
+          <p:cNvPr id="4" name="Picture 3">
+            <a:extLst>
+              <a:ext uri="{FF2B5EF4-FFF2-40B4-BE49-F238E27FC236}">
+                <a16:creationId xmlns:a16="http://schemas.microsoft.com/office/drawing/2014/main" id="{B3B4C156-5A60-E8D8-28AB-A2D304340DA7}"/>
+              </a:ext>
+            </a:extLst>
+          </p:cNvPr>
+          <p:cNvPicPr>
+            <a:picLocks noChangeAspect="1"/>
+          </p:cNvPicPr>
+          <p:nvPr/>
+        </p:nvPicPr>
+        <p:blipFill>
+          <a:blip r:embed="rId2"/>
+          <a:stretch>
+            <a:fillRect/>
+          </a:stretch>
+        </p:blipFill>
+        <p:spPr>
+          <a:xfrm>
+            <a:off x="6041050" y="1911926"/>
+            <a:ext cx="6150950" cy="4946073"/>
+          </a:xfrm>
+          <a:prstGeom prst="rect">
+            <a:avLst/>
+          </a:prstGeom>
+        </p:spPr>
+      </p:pic>
+      <p:pic>
+        <p:nvPicPr>
+          <p:cNvPr id="6" name="Picture 5">
+            <a:extLst>
+              <a:ext uri="{FF2B5EF4-FFF2-40B4-BE49-F238E27FC236}">
+                <a16:creationId xmlns:a16="http://schemas.microsoft.com/office/drawing/2014/main" id="{F180BBF7-C2DC-8D7A-F340-C682C8AF822B}"/>
+              </a:ext>
+            </a:extLst>
+          </p:cNvPr>
+          <p:cNvPicPr>
+            <a:picLocks noChangeAspect="1"/>
+          </p:cNvPicPr>
+          <p:nvPr/>
+        </p:nvPicPr>
+        <p:blipFill>
+          <a:blip r:embed="rId3"/>
+          <a:stretch>
+            <a:fillRect/>
+          </a:stretch>
+        </p:blipFill>
+        <p:spPr>
+          <a:xfrm>
+            <a:off x="0" y="4309420"/>
+            <a:ext cx="5631676" cy="2548579"/>
+          </a:xfrm>
+          <a:prstGeom prst="rect">
+            <a:avLst/>
+          </a:prstGeom>
+          <a:ln w="38100" cap="sq">
+            <a:solidFill>
+              <a:srgbClr val="000000"/>
+            </a:solidFill>
+            <a:prstDash val="solid"/>
+            <a:miter lim="800000"/>
+          </a:ln>
+          <a:effectLst>
+            <a:outerShdw blurRad="50800" dist="38100" dir="2700000" algn="tl" rotWithShape="0">
+              <a:srgbClr val="000000">
+                <a:alpha val="43000"/>
+              </a:srgbClr>
+            </a:outerShdw>
+          </a:effectLst>
+        </p:spPr>
+      </p:pic>
     </p:spTree>
     <p:extLst>
       <p:ext uri="{BB962C8B-B14F-4D97-AF65-F5344CB8AC3E}">
@@ -3397,7 +3639,7 @@
 </p:sld>
 </file>
 
-<file path=ppt/slides/slide2.xml><?xml version="1.0" encoding="utf-8"?>
+<file path=ppt/slides/slide10.xml><?xml version="1.0" encoding="utf-8"?>
 <p:sld xmlns:a="http://schemas.openxmlformats.org/drawingml/2006/main" xmlns:r="http://schemas.openxmlformats.org/officeDocument/2006/relationships" xmlns:p="http://schemas.openxmlformats.org/presentationml/2006/main">
   <p:cSld>
     <p:spTree>
@@ -3435,7 +3677,7 @@
         <p:spPr>
           <a:xfrm>
             <a:off x="217714" y="255046"/>
-            <a:ext cx="11756571" cy="355354"/>
+            <a:ext cx="11756571" cy="4256422"/>
           </a:xfrm>
           <a:prstGeom prst="rect">
             <a:avLst/>
@@ -3455,21 +3697,500 @@
               <a:buNone/>
             </a:pPr>
             <a:r>
-              <a:rPr kumimoji="0" lang="en-US" altLang="en-US" sz="1300" b="0" i="0" u="none" strike="noStrike" cap="none" normalizeH="0" baseline="0">
-                <a:ln>
-                  <a:noFill/>
-                </a:ln>
+              <a:rPr lang="en-US" altLang="en-US" sz="1300" b="1">
+                <a:latin typeface="Arial" panose="020B0604020202020204" pitchFamily="34" charset="0"/>
+              </a:rPr>
+              <a:t>Bizim aldığım</a:t>
+            </a:r>
+            <a:r>
+              <a:rPr lang="az-Latn-AZ" altLang="en-US" sz="1300" b="1">
+                <a:latin typeface="Arial" panose="020B0604020202020204" pitchFamily="34" charset="0"/>
+              </a:rPr>
+              <a:t>ız</a:t>
+            </a:r>
+            <a:r>
+              <a:rPr lang="en-US" altLang="en-US" sz="1300" b="1">
+                <a:latin typeface="Arial" panose="020B0604020202020204" pitchFamily="34" charset="0"/>
+              </a:rPr>
+              <a:t> xəta deyir</a:t>
+            </a:r>
+            <a:r>
+              <a:rPr lang="en-US" altLang="en-US" sz="1300">
+                <a:latin typeface="Arial" panose="020B0604020202020204" pitchFamily="34" charset="0"/>
+              </a:rPr>
+              <a:t>:</a:t>
+            </a:r>
+            <a:r>
+              <a:rPr lang="az-Latn-AZ" altLang="en-US" sz="1300">
+                <a:latin typeface="Arial" panose="020B0604020202020204" pitchFamily="34" charset="0"/>
+              </a:rPr>
+              <a:t> </a:t>
+            </a:r>
+            <a:r>
+              <a:rPr lang="en-US" altLang="en-US" sz="1300" b="1">
                 <a:solidFill>
-                  <a:schemeClr val="tx1"/>
+                  <a:srgbClr val="0070C0"/>
                 </a:solidFill>
-                <a:effectLst/>
+                <a:latin typeface="Arial" panose="020B0604020202020204" pitchFamily="34" charset="0"/>
+              </a:rPr>
+              <a:t>Argument #1 ($path) must be of type string, null given</a:t>
+            </a:r>
+            <a:r>
+              <a:rPr lang="az-Latn-AZ" altLang="en-US" sz="1300">
                 <a:latin typeface="Arial" panose="020B0604020202020204" pitchFamily="34" charset="0"/>
               </a:rPr>
               <a:t>.</a:t>
             </a:r>
-          </a:p>
-        </p:txBody>
-      </p:sp>
+            <a:endParaRPr lang="en-US" altLang="en-US" sz="1300">
+              <a:latin typeface="Arial" panose="020B0604020202020204" pitchFamily="34" charset="0"/>
+            </a:endParaRPr>
+          </a:p>
+          <a:p>
+            <a:pPr>
+              <a:lnSpc>
+                <a:spcPct val="150000"/>
+              </a:lnSpc>
+              <a:buNone/>
+            </a:pPr>
+            <a:endParaRPr lang="en-US" altLang="en-US" sz="1300">
+              <a:latin typeface="Arial" panose="020B0604020202020204" pitchFamily="34" charset="0"/>
+            </a:endParaRPr>
+          </a:p>
+          <a:p>
+            <a:pPr>
+              <a:lnSpc>
+                <a:spcPct val="150000"/>
+              </a:lnSpc>
+              <a:buNone/>
+            </a:pPr>
+            <a:r>
+              <a:rPr lang="en-US" altLang="en-US" sz="1300">
+                <a:latin typeface="Arial" panose="020B0604020202020204" pitchFamily="34" charset="0"/>
+              </a:rPr>
+              <a:t>Yəni </a:t>
+            </a:r>
+            <a:r>
+              <a:rPr lang="en-US" altLang="en-US" sz="1300" b="1">
+                <a:latin typeface="Arial" panose="020B0604020202020204" pitchFamily="34" charset="0"/>
+              </a:rPr>
+              <a:t>deleteImage() </a:t>
+            </a:r>
+            <a:r>
+              <a:rPr lang="en-US" altLang="en-US" sz="1300">
+                <a:latin typeface="Arial" panose="020B0604020202020204" pitchFamily="34" charset="0"/>
+              </a:rPr>
+              <a:t>metoduna </a:t>
+            </a:r>
+            <a:r>
+              <a:rPr lang="en-US" altLang="en-US" sz="1300" b="1">
+                <a:latin typeface="Arial" panose="020B0604020202020204" pitchFamily="34" charset="0"/>
+              </a:rPr>
+              <a:t>string</a:t>
+            </a:r>
+            <a:r>
+              <a:rPr lang="en-US" altLang="en-US" sz="1300">
+                <a:latin typeface="Arial" panose="020B0604020202020204" pitchFamily="34" charset="0"/>
+              </a:rPr>
+              <a:t> tipində yol (məs: "</a:t>
+            </a:r>
+            <a:r>
+              <a:rPr lang="en-US" altLang="en-US" sz="1300" b="1">
+                <a:latin typeface="Arial" panose="020B0604020202020204" pitchFamily="34" charset="0"/>
+              </a:rPr>
+              <a:t>uploads/banner.jpg</a:t>
+            </a:r>
+            <a:r>
+              <a:rPr lang="en-US" altLang="en-US" sz="1300">
+                <a:latin typeface="Arial" panose="020B0604020202020204" pitchFamily="34" charset="0"/>
+              </a:rPr>
+              <a:t>") göndərilməlidir, amma sən </a:t>
+            </a:r>
+            <a:r>
+              <a:rPr lang="en-US" altLang="en-US" sz="1300" b="1">
+                <a:solidFill>
+                  <a:srgbClr val="FF0000"/>
+                </a:solidFill>
+                <a:latin typeface="Arial" panose="020B0604020202020204" pitchFamily="34" charset="0"/>
+              </a:rPr>
+              <a:t>null</a:t>
+            </a:r>
+            <a:r>
+              <a:rPr lang="en-US" altLang="en-US" sz="1300">
+                <a:latin typeface="Arial" panose="020B0604020202020204" pitchFamily="34" charset="0"/>
+              </a:rPr>
+              <a:t> göndərmisən.</a:t>
+            </a:r>
+            <a:endParaRPr lang="az-Latn-AZ" altLang="en-US" sz="1300">
+              <a:latin typeface="Arial" panose="020B0604020202020204" pitchFamily="34" charset="0"/>
+            </a:endParaRPr>
+          </a:p>
+          <a:p>
+            <a:pPr>
+              <a:lnSpc>
+                <a:spcPct val="150000"/>
+              </a:lnSpc>
+              <a:buNone/>
+            </a:pPr>
+            <a:endParaRPr kumimoji="0" lang="az-Latn-AZ" altLang="en-US" sz="1300" b="0" i="0" u="none" strike="noStrike" cap="none" normalizeH="0" baseline="0">
+              <a:ln>
+                <a:noFill/>
+              </a:ln>
+              <a:solidFill>
+                <a:schemeClr val="tx1"/>
+              </a:solidFill>
+              <a:effectLst/>
+              <a:latin typeface="Arial" panose="020B0604020202020204" pitchFamily="34" charset="0"/>
+            </a:endParaRPr>
+          </a:p>
+          <a:p>
+            <a:pPr>
+              <a:lnSpc>
+                <a:spcPct val="150000"/>
+              </a:lnSpc>
+              <a:buNone/>
+            </a:pPr>
+            <a:r>
+              <a:rPr lang="en-US" altLang="en-US" sz="1300">
+                <a:latin typeface="Arial" panose="020B0604020202020204" pitchFamily="34" charset="0"/>
+              </a:rPr>
+              <a:t>Bu adətən belə hallarda baş verir:</a:t>
+            </a:r>
+          </a:p>
+          <a:p>
+            <a:pPr marL="742950" lvl="1" indent="-285750">
+              <a:lnSpc>
+                <a:spcPct val="150000"/>
+              </a:lnSpc>
+              <a:buFont typeface="Wingdings" panose="05000000000000000000" pitchFamily="2" charset="2"/>
+              <a:buChar char="q"/>
+            </a:pPr>
+            <a:r>
+              <a:rPr lang="en-US" altLang="en-US" sz="1300">
+                <a:latin typeface="Arial" panose="020B0604020202020204" pitchFamily="34" charset="0"/>
+              </a:rPr>
+              <a:t>Silmək istədiyin şəkilin bazada yolu yoxdur (</a:t>
+            </a:r>
+            <a:r>
+              <a:rPr lang="en-US" altLang="en-US" sz="1300" b="1">
+                <a:latin typeface="Arial" panose="020B0604020202020204" pitchFamily="34" charset="0"/>
+              </a:rPr>
+              <a:t>null</a:t>
+            </a:r>
+            <a:r>
+              <a:rPr lang="en-US" altLang="en-US" sz="1300">
+                <a:latin typeface="Arial" panose="020B0604020202020204" pitchFamily="34" charset="0"/>
+              </a:rPr>
+              <a:t>).</a:t>
+            </a:r>
+          </a:p>
+          <a:p>
+            <a:pPr marL="742950" lvl="1" indent="-285750">
+              <a:lnSpc>
+                <a:spcPct val="150000"/>
+              </a:lnSpc>
+              <a:buFont typeface="Wingdings" panose="05000000000000000000" pitchFamily="2" charset="2"/>
+              <a:buChar char="q"/>
+            </a:pPr>
+            <a:r>
+              <a:rPr lang="en-US" altLang="en-US" sz="1300">
+                <a:latin typeface="Arial" panose="020B0604020202020204" pitchFamily="34" charset="0"/>
+              </a:rPr>
+              <a:t>Sən </a:t>
+            </a:r>
+            <a:r>
+              <a:rPr lang="en-US" altLang="en-US" sz="1300" b="1">
+                <a:latin typeface="Arial" panose="020B0604020202020204" pitchFamily="34" charset="0"/>
+              </a:rPr>
+              <a:t>deleteImage($slider-&gt;banner) </a:t>
+            </a:r>
+            <a:r>
+              <a:rPr lang="en-US" altLang="en-US" sz="1300">
+                <a:latin typeface="Arial" panose="020B0604020202020204" pitchFamily="34" charset="0"/>
+              </a:rPr>
+              <a:t>çağırmısan, amma </a:t>
+            </a:r>
+            <a:r>
+              <a:rPr lang="en-US" altLang="en-US" sz="1300" b="1">
+                <a:latin typeface="Arial" panose="020B0604020202020204" pitchFamily="34" charset="0"/>
+              </a:rPr>
+              <a:t>$slider-&gt;banner </a:t>
+            </a:r>
+            <a:r>
+              <a:rPr lang="en-US" altLang="en-US" sz="1300">
+                <a:latin typeface="Arial" panose="020B0604020202020204" pitchFamily="34" charset="0"/>
+              </a:rPr>
+              <a:t>boş qalıb.</a:t>
+            </a:r>
+            <a:endParaRPr lang="az-Latn-AZ" altLang="en-US" sz="1300">
+              <a:latin typeface="Arial" panose="020B0604020202020204" pitchFamily="34" charset="0"/>
+            </a:endParaRPr>
+          </a:p>
+          <a:p>
+            <a:pPr>
+              <a:lnSpc>
+                <a:spcPct val="150000"/>
+              </a:lnSpc>
+              <a:buNone/>
+            </a:pPr>
+            <a:endParaRPr kumimoji="0" lang="az-Latn-AZ" altLang="en-US" sz="1300" b="0" i="0" u="none" strike="noStrike" cap="none" normalizeH="0" baseline="0">
+              <a:ln>
+                <a:noFill/>
+              </a:ln>
+              <a:solidFill>
+                <a:schemeClr val="tx1"/>
+              </a:solidFill>
+              <a:effectLst/>
+              <a:latin typeface="Arial" panose="020B0604020202020204" pitchFamily="34" charset="0"/>
+            </a:endParaRPr>
+          </a:p>
+          <a:p>
+            <a:pPr>
+              <a:lnSpc>
+                <a:spcPct val="150000"/>
+              </a:lnSpc>
+              <a:buNone/>
+            </a:pPr>
+            <a:endParaRPr lang="az-Latn-AZ" altLang="en-US" sz="1300">
+              <a:latin typeface="Arial" panose="020B0604020202020204" pitchFamily="34" charset="0"/>
+            </a:endParaRPr>
+          </a:p>
+          <a:p>
+            <a:pPr>
+              <a:lnSpc>
+                <a:spcPct val="150000"/>
+              </a:lnSpc>
+              <a:buNone/>
+            </a:pPr>
+            <a:endParaRPr kumimoji="0" lang="az-Latn-AZ" altLang="en-US" sz="1300" b="0" i="0" u="none" strike="noStrike" cap="none" normalizeH="0" baseline="0">
+              <a:ln>
+                <a:noFill/>
+              </a:ln>
+              <a:solidFill>
+                <a:schemeClr val="tx1"/>
+              </a:solidFill>
+              <a:effectLst/>
+              <a:latin typeface="Arial" panose="020B0604020202020204" pitchFamily="34" charset="0"/>
+            </a:endParaRPr>
+          </a:p>
+          <a:p>
+            <a:pPr>
+              <a:lnSpc>
+                <a:spcPct val="150000"/>
+              </a:lnSpc>
+              <a:buNone/>
+            </a:pPr>
+            <a:r>
+              <a:rPr lang="en-US" altLang="en-US" sz="1300" b="1">
+                <a:latin typeface="Arial" panose="020B0604020202020204" pitchFamily="34" charset="0"/>
+              </a:rPr>
+              <a:t>Həll yolları</a:t>
+            </a:r>
+            <a:r>
+              <a:rPr lang="az-Latn-AZ" altLang="en-US" sz="1300">
+                <a:latin typeface="Arial" panose="020B0604020202020204" pitchFamily="34" charset="0"/>
+              </a:rPr>
+              <a:t>:</a:t>
+            </a:r>
+            <a:r>
+              <a:rPr lang="en-US" altLang="en-US" sz="1300">
+                <a:latin typeface="Arial" panose="020B0604020202020204" pitchFamily="34" charset="0"/>
+              </a:rPr>
+              <a:t> </a:t>
+            </a:r>
+            <a:endParaRPr lang="az-Latn-AZ" altLang="en-US" sz="1300">
+              <a:latin typeface="Arial" panose="020B0604020202020204" pitchFamily="34" charset="0"/>
+            </a:endParaRPr>
+          </a:p>
+          <a:p>
+            <a:pPr>
+              <a:lnSpc>
+                <a:spcPct val="150000"/>
+              </a:lnSpc>
+              <a:buNone/>
+            </a:pPr>
+            <a:r>
+              <a:rPr lang="az-Latn-AZ" altLang="en-US" sz="1300">
+                <a:latin typeface="Arial" panose="020B0604020202020204" pitchFamily="34" charset="0"/>
+              </a:rPr>
+              <a:t>1) </a:t>
+            </a:r>
+            <a:r>
+              <a:rPr lang="en-US" altLang="en-US" sz="1300">
+                <a:latin typeface="Arial" panose="020B0604020202020204" pitchFamily="34" charset="0"/>
+              </a:rPr>
+              <a:t>Parametr </a:t>
+            </a:r>
+            <a:r>
+              <a:rPr lang="en-US" altLang="en-US" sz="1300" b="1">
+                <a:latin typeface="Arial" panose="020B0604020202020204" pitchFamily="34" charset="0"/>
+              </a:rPr>
+              <a:t>opsional</a:t>
+            </a:r>
+            <a:r>
+              <a:rPr lang="en-US" altLang="en-US" sz="1300">
+                <a:latin typeface="Arial" panose="020B0604020202020204" pitchFamily="34" charset="0"/>
+              </a:rPr>
+              <a:t> olsun və </a:t>
+            </a:r>
+            <a:r>
+              <a:rPr lang="en-US" altLang="en-US" sz="1300" b="1">
+                <a:latin typeface="Arial" panose="020B0604020202020204" pitchFamily="34" charset="0"/>
+              </a:rPr>
+              <a:t>null</a:t>
+            </a:r>
+            <a:r>
+              <a:rPr lang="en-US" altLang="en-US" sz="1300">
+                <a:latin typeface="Arial" panose="020B0604020202020204" pitchFamily="34" charset="0"/>
+              </a:rPr>
+              <a:t> gələrsə işləməsin</a:t>
+            </a:r>
+            <a:r>
+              <a:rPr lang="az-Latn-AZ" altLang="en-US" sz="1300">
+                <a:latin typeface="Arial" panose="020B0604020202020204" pitchFamily="34" charset="0"/>
+              </a:rPr>
+              <a:t>: Burada </a:t>
+            </a:r>
+            <a:r>
+              <a:rPr lang="az-Latn-AZ" altLang="en-US" sz="1300" b="1">
+                <a:solidFill>
+                  <a:srgbClr val="00B050"/>
+                </a:solidFill>
+                <a:latin typeface="Arial" panose="020B0604020202020204" pitchFamily="34" charset="0"/>
+              </a:rPr>
+              <a:t>?string </a:t>
+            </a:r>
+            <a:r>
+              <a:rPr lang="az-Latn-AZ" altLang="en-US" sz="1300">
+                <a:latin typeface="Arial" panose="020B0604020202020204" pitchFamily="34" charset="0"/>
+              </a:rPr>
+              <a:t>dediyimiz zaman </a:t>
+            </a:r>
+            <a:r>
+              <a:rPr lang="az-Latn-AZ" altLang="en-US" sz="1300" b="1">
+                <a:latin typeface="Arial" panose="020B0604020202020204" pitchFamily="34" charset="0"/>
+              </a:rPr>
+              <a:t>$path </a:t>
+            </a:r>
+            <a:r>
+              <a:rPr lang="az-Latn-AZ" altLang="en-US" sz="1300">
+                <a:latin typeface="Arial" panose="020B0604020202020204" pitchFamily="34" charset="0"/>
+              </a:rPr>
+              <a:t>həm </a:t>
+            </a:r>
+            <a:r>
+              <a:rPr lang="az-Latn-AZ" altLang="en-US" sz="1300" b="1">
+                <a:latin typeface="Arial" panose="020B0604020202020204" pitchFamily="34" charset="0"/>
+              </a:rPr>
+              <a:t>string</a:t>
+            </a:r>
+            <a:r>
+              <a:rPr lang="az-Latn-AZ" altLang="en-US" sz="1300">
+                <a:latin typeface="Arial" panose="020B0604020202020204" pitchFamily="34" charset="0"/>
+              </a:rPr>
+              <a:t>, həm də </a:t>
+            </a:r>
+            <a:r>
+              <a:rPr lang="az-Latn-AZ" altLang="en-US" sz="1300" b="1">
+                <a:latin typeface="Arial" panose="020B0604020202020204" pitchFamily="34" charset="0"/>
+              </a:rPr>
+              <a:t>null</a:t>
+            </a:r>
+            <a:r>
+              <a:rPr lang="az-Latn-AZ" altLang="en-US" sz="1300">
+                <a:latin typeface="Arial" panose="020B0604020202020204" pitchFamily="34" charset="0"/>
+              </a:rPr>
+              <a:t> ola bilər. Əlavə olaraq </a:t>
+            </a:r>
+            <a:r>
+              <a:rPr lang="az-Latn-AZ" altLang="en-US" sz="1300" b="1">
+                <a:solidFill>
+                  <a:srgbClr val="00B050"/>
+                </a:solidFill>
+                <a:latin typeface="Arial" panose="020B0604020202020204" pitchFamily="34" charset="0"/>
+              </a:rPr>
+              <a:t>$path &amp;&amp; </a:t>
+            </a:r>
+            <a:r>
+              <a:rPr lang="az-Latn-AZ" altLang="en-US" sz="1300">
+                <a:latin typeface="Arial" panose="020B0604020202020204" pitchFamily="34" charset="0"/>
+              </a:rPr>
+              <a:t>yoxlaması ilə, </a:t>
+            </a:r>
+            <a:r>
+              <a:rPr lang="az-Latn-AZ" altLang="en-US" sz="1300" b="1">
+                <a:latin typeface="Arial" panose="020B0604020202020204" pitchFamily="34" charset="0"/>
+              </a:rPr>
+              <a:t>null</a:t>
+            </a:r>
+            <a:r>
+              <a:rPr lang="az-Latn-AZ" altLang="en-US" sz="1300">
+                <a:latin typeface="Arial" panose="020B0604020202020204" pitchFamily="34" charset="0"/>
+              </a:rPr>
+              <a:t> və ya </a:t>
+            </a:r>
+            <a:r>
+              <a:rPr lang="az-Latn-AZ" altLang="en-US" sz="1300" b="1">
+                <a:latin typeface="Arial" panose="020B0604020202020204" pitchFamily="34" charset="0"/>
+              </a:rPr>
+              <a:t>boş dəyər </a:t>
+            </a:r>
+            <a:r>
+              <a:rPr lang="az-Latn-AZ" altLang="en-US" sz="1300">
+                <a:latin typeface="Arial" panose="020B0604020202020204" pitchFamily="34" charset="0"/>
+              </a:rPr>
+              <a:t>gələndə heç nə etmə deyirik.</a:t>
+            </a:r>
+          </a:p>
+          <a:p>
+            <a:pPr>
+              <a:lnSpc>
+                <a:spcPct val="150000"/>
+              </a:lnSpc>
+              <a:buNone/>
+            </a:pPr>
+            <a:endParaRPr kumimoji="0" lang="en-US" altLang="en-US" sz="1300" b="0" i="0" u="none" strike="noStrike" cap="none" normalizeH="0" baseline="0">
+              <a:ln>
+                <a:noFill/>
+              </a:ln>
+              <a:solidFill>
+                <a:schemeClr val="tx1"/>
+              </a:solidFill>
+              <a:effectLst/>
+              <a:latin typeface="Arial" panose="020B0604020202020204" pitchFamily="34" charset="0"/>
+            </a:endParaRPr>
+          </a:p>
+        </p:txBody>
+      </p:sp>
+      <p:pic>
+        <p:nvPicPr>
+          <p:cNvPr id="4" name="Picture 3">
+            <a:extLst>
+              <a:ext uri="{FF2B5EF4-FFF2-40B4-BE49-F238E27FC236}">
+                <a16:creationId xmlns:a16="http://schemas.microsoft.com/office/drawing/2014/main" id="{5AB983CE-2CD4-FDA4-14D0-0216733A0F60}"/>
+              </a:ext>
+            </a:extLst>
+          </p:cNvPr>
+          <p:cNvPicPr>
+            <a:picLocks noChangeAspect="1"/>
+          </p:cNvPicPr>
+          <p:nvPr/>
+        </p:nvPicPr>
+        <p:blipFill>
+          <a:blip r:embed="rId2"/>
+          <a:stretch>
+            <a:fillRect/>
+          </a:stretch>
+        </p:blipFill>
+        <p:spPr>
+          <a:xfrm>
+            <a:off x="0" y="4278746"/>
+            <a:ext cx="4496427" cy="1362265"/>
+          </a:xfrm>
+          <a:prstGeom prst="rect">
+            <a:avLst/>
+          </a:prstGeom>
+        </p:spPr>
+      </p:pic>
     </p:spTree>
     <p:extLst>
       <p:ext uri="{BB962C8B-B14F-4D97-AF65-F5344CB8AC3E}">
@@ -3483,7 +4204,7 @@
 </p:sld>
 </file>
 
-<file path=ppt/slides/slide3.xml><?xml version="1.0" encoding="utf-8"?>
+<file path=ppt/slides/slide11.xml><?xml version="1.0" encoding="utf-8"?>
 <p:sld xmlns:a="http://schemas.openxmlformats.org/drawingml/2006/main" xmlns:r="http://schemas.openxmlformats.org/officeDocument/2006/relationships" xmlns:p="http://schemas.openxmlformats.org/presentationml/2006/main">
   <p:cSld>
     <p:spTree>
@@ -3541,6 +4262,131 @@
               <a:buNone/>
             </a:pPr>
             <a:r>
+              <a:rPr lang="en-US" altLang="en-US" sz="1300">
+                <a:latin typeface="Arial" panose="020B0604020202020204" pitchFamily="34" charset="0"/>
+              </a:rPr>
+              <a:t>Kodumuz </a:t>
+            </a:r>
+            <a:r>
+              <a:rPr lang="az-Latn-AZ" altLang="en-US" sz="1300">
+                <a:latin typeface="Arial" panose="020B0604020202020204" pitchFamily="34" charset="0"/>
+              </a:rPr>
+              <a:t>işləyir.</a:t>
+            </a:r>
+            <a:endParaRPr kumimoji="0" lang="en-US" altLang="en-US" sz="1300" b="0" i="0" u="none" strike="noStrike" cap="none" normalizeH="0" baseline="0">
+              <a:ln>
+                <a:noFill/>
+              </a:ln>
+              <a:solidFill>
+                <a:schemeClr val="tx1"/>
+              </a:solidFill>
+              <a:effectLst/>
+              <a:latin typeface="Arial" panose="020B0604020202020204" pitchFamily="34" charset="0"/>
+            </a:endParaRPr>
+          </a:p>
+        </p:txBody>
+      </p:sp>
+      <p:pic>
+        <p:nvPicPr>
+          <p:cNvPr id="4" name="Picture 3">
+            <a:extLst>
+              <a:ext uri="{FF2B5EF4-FFF2-40B4-BE49-F238E27FC236}">
+                <a16:creationId xmlns:a16="http://schemas.microsoft.com/office/drawing/2014/main" id="{79D6DD5A-ADCA-E1B0-D990-27F2CA53AB8E}"/>
+              </a:ext>
+            </a:extLst>
+          </p:cNvPr>
+          <p:cNvPicPr>
+            <a:picLocks noChangeAspect="1"/>
+          </p:cNvPicPr>
+          <p:nvPr/>
+        </p:nvPicPr>
+        <p:blipFill>
+          <a:blip r:embed="rId2"/>
+          <a:stretch>
+            <a:fillRect/>
+          </a:stretch>
+        </p:blipFill>
+        <p:spPr>
+          <a:xfrm>
+            <a:off x="4418515" y="1266045"/>
+            <a:ext cx="7773485" cy="5591955"/>
+          </a:xfrm>
+          <a:prstGeom prst="rect">
+            <a:avLst/>
+          </a:prstGeom>
+        </p:spPr>
+      </p:pic>
+    </p:spTree>
+    <p:extLst>
+      <p:ext uri="{BB962C8B-B14F-4D97-AF65-F5344CB8AC3E}">
+        <p14:creationId xmlns:p14="http://schemas.microsoft.com/office/powerpoint/2010/main" val="3095838342"/>
+      </p:ext>
+    </p:extLst>
+  </p:cSld>
+  <p:clrMapOvr>
+    <a:masterClrMapping/>
+  </p:clrMapOvr>
+</p:sld>
+</file>
+
+<file path=ppt/slides/slide12.xml><?xml version="1.0" encoding="utf-8"?>
+<p:sld xmlns:a="http://schemas.openxmlformats.org/drawingml/2006/main" xmlns:r="http://schemas.openxmlformats.org/officeDocument/2006/relationships" xmlns:p="http://schemas.openxmlformats.org/presentationml/2006/main">
+  <p:cSld>
+    <p:spTree>
+      <p:nvGrpSpPr>
+        <p:cNvPr id="1" name="">
+          <a:extLst>
+            <a:ext uri="{FF2B5EF4-FFF2-40B4-BE49-F238E27FC236}">
+              <a16:creationId xmlns:a16="http://schemas.microsoft.com/office/drawing/2014/main" id="{319B4141-273C-5AF7-48E9-740B66984533}"/>
+            </a:ext>
+          </a:extLst>
+        </p:cNvPr>
+        <p:cNvGrpSpPr/>
+        <p:nvPr/>
+      </p:nvGrpSpPr>
+      <p:grpSpPr>
+        <a:xfrm>
+          <a:off x="0" y="0"/>
+          <a:ext cx="0" cy="0"/>
+          <a:chOff x="0" y="0"/>
+          <a:chExt cx="0" cy="0"/>
+        </a:xfrm>
+      </p:grpSpPr>
+      <p:sp>
+        <p:nvSpPr>
+          <p:cNvPr id="3" name="TextBox 2">
+            <a:extLst>
+              <a:ext uri="{FF2B5EF4-FFF2-40B4-BE49-F238E27FC236}">
+                <a16:creationId xmlns:a16="http://schemas.microsoft.com/office/drawing/2014/main" id="{6F90E36D-7B76-C1CF-C757-D8744020E0AA}"/>
+              </a:ext>
+            </a:extLst>
+          </p:cNvPr>
+          <p:cNvSpPr txBox="1"/>
+          <p:nvPr/>
+        </p:nvSpPr>
+        <p:spPr>
+          <a:xfrm>
+            <a:off x="217714" y="255046"/>
+            <a:ext cx="11756571" cy="355354"/>
+          </a:xfrm>
+          <a:prstGeom prst="rect">
+            <a:avLst/>
+          </a:prstGeom>
+          <a:noFill/>
+        </p:spPr>
+        <p:txBody>
+          <a:bodyPr wrap="square">
+            <a:spAutoFit/>
+          </a:bodyPr>
+          <a:lstStyle/>
+          <a:p>
+            <a:pPr>
+              <a:lnSpc>
+                <a:spcPct val="150000"/>
+              </a:lnSpc>
+              <a:buNone/>
+            </a:pPr>
+            <a:r>
               <a:rPr kumimoji="0" lang="en-US" altLang="en-US" sz="1300" b="0" i="0" u="none" strike="noStrike" cap="none" normalizeH="0" baseline="0">
                 <a:ln>
                   <a:noFill/>
@@ -3559,7 +4405,1931 @@
     </p:spTree>
     <p:extLst>
       <p:ext uri="{BB962C8B-B14F-4D97-AF65-F5344CB8AC3E}">
-        <p14:creationId xmlns:p14="http://schemas.microsoft.com/office/powerpoint/2010/main" val="3095838342"/>
+        <p14:creationId xmlns:p14="http://schemas.microsoft.com/office/powerpoint/2010/main" val="2613710625"/>
+      </p:ext>
+    </p:extLst>
+  </p:cSld>
+  <p:clrMapOvr>
+    <a:masterClrMapping/>
+  </p:clrMapOvr>
+</p:sld>
+</file>
+
+<file path=ppt/slides/slide13.xml><?xml version="1.0" encoding="utf-8"?>
+<p:sld xmlns:a="http://schemas.openxmlformats.org/drawingml/2006/main" xmlns:r="http://schemas.openxmlformats.org/officeDocument/2006/relationships" xmlns:p="http://schemas.openxmlformats.org/presentationml/2006/main">
+  <p:cSld>
+    <p:spTree>
+      <p:nvGrpSpPr>
+        <p:cNvPr id="1" name="">
+          <a:extLst>
+            <a:ext uri="{FF2B5EF4-FFF2-40B4-BE49-F238E27FC236}">
+              <a16:creationId xmlns:a16="http://schemas.microsoft.com/office/drawing/2014/main" id="{217D89AA-B75D-01CD-63F2-9030BB573314}"/>
+            </a:ext>
+          </a:extLst>
+        </p:cNvPr>
+        <p:cNvGrpSpPr/>
+        <p:nvPr/>
+      </p:nvGrpSpPr>
+      <p:grpSpPr>
+        <a:xfrm>
+          <a:off x="0" y="0"/>
+          <a:ext cx="0" cy="0"/>
+          <a:chOff x="0" y="0"/>
+          <a:chExt cx="0" cy="0"/>
+        </a:xfrm>
+      </p:grpSpPr>
+      <p:sp>
+        <p:nvSpPr>
+          <p:cNvPr id="3" name="TextBox 2">
+            <a:extLst>
+              <a:ext uri="{FF2B5EF4-FFF2-40B4-BE49-F238E27FC236}">
+                <a16:creationId xmlns:a16="http://schemas.microsoft.com/office/drawing/2014/main" id="{1C3522E7-6CE9-AC56-3377-144398599CA3}"/>
+              </a:ext>
+            </a:extLst>
+          </p:cNvPr>
+          <p:cNvSpPr txBox="1"/>
+          <p:nvPr/>
+        </p:nvSpPr>
+        <p:spPr>
+          <a:xfrm>
+            <a:off x="217714" y="255046"/>
+            <a:ext cx="11756571" cy="355354"/>
+          </a:xfrm>
+          <a:prstGeom prst="rect">
+            <a:avLst/>
+          </a:prstGeom>
+          <a:noFill/>
+        </p:spPr>
+        <p:txBody>
+          <a:bodyPr wrap="square">
+            <a:spAutoFit/>
+          </a:bodyPr>
+          <a:lstStyle/>
+          <a:p>
+            <a:pPr>
+              <a:lnSpc>
+                <a:spcPct val="150000"/>
+              </a:lnSpc>
+              <a:buNone/>
+            </a:pPr>
+            <a:r>
+              <a:rPr kumimoji="0" lang="en-US" altLang="en-US" sz="1300" b="0" i="0" u="none" strike="noStrike" cap="none" normalizeH="0" baseline="0">
+                <a:ln>
+                  <a:noFill/>
+                </a:ln>
+                <a:solidFill>
+                  <a:schemeClr val="tx1"/>
+                </a:solidFill>
+                <a:effectLst/>
+                <a:latin typeface="Arial" panose="020B0604020202020204" pitchFamily="34" charset="0"/>
+              </a:rPr>
+              <a:t>.</a:t>
+            </a:r>
+          </a:p>
+        </p:txBody>
+      </p:sp>
+    </p:spTree>
+    <p:extLst>
+      <p:ext uri="{BB962C8B-B14F-4D97-AF65-F5344CB8AC3E}">
+        <p14:creationId xmlns:p14="http://schemas.microsoft.com/office/powerpoint/2010/main" val="543458528"/>
+      </p:ext>
+    </p:extLst>
+  </p:cSld>
+  <p:clrMapOvr>
+    <a:masterClrMapping/>
+  </p:clrMapOvr>
+</p:sld>
+</file>
+
+<file path=ppt/slides/slide14.xml><?xml version="1.0" encoding="utf-8"?>
+<p:sld xmlns:a="http://schemas.openxmlformats.org/drawingml/2006/main" xmlns:r="http://schemas.openxmlformats.org/officeDocument/2006/relationships" xmlns:p="http://schemas.openxmlformats.org/presentationml/2006/main">
+  <p:cSld>
+    <p:spTree>
+      <p:nvGrpSpPr>
+        <p:cNvPr id="1" name="">
+          <a:extLst>
+            <a:ext uri="{FF2B5EF4-FFF2-40B4-BE49-F238E27FC236}">
+              <a16:creationId xmlns:a16="http://schemas.microsoft.com/office/drawing/2014/main" id="{1EBC838C-630D-8298-46C3-DF97EF0FF0C5}"/>
+            </a:ext>
+          </a:extLst>
+        </p:cNvPr>
+        <p:cNvGrpSpPr/>
+        <p:nvPr/>
+      </p:nvGrpSpPr>
+      <p:grpSpPr>
+        <a:xfrm>
+          <a:off x="0" y="0"/>
+          <a:ext cx="0" cy="0"/>
+          <a:chOff x="0" y="0"/>
+          <a:chExt cx="0" cy="0"/>
+        </a:xfrm>
+      </p:grpSpPr>
+      <p:sp>
+        <p:nvSpPr>
+          <p:cNvPr id="3" name="TextBox 2">
+            <a:extLst>
+              <a:ext uri="{FF2B5EF4-FFF2-40B4-BE49-F238E27FC236}">
+                <a16:creationId xmlns:a16="http://schemas.microsoft.com/office/drawing/2014/main" id="{C257377D-5F5C-E1F6-F874-3E399355E8AF}"/>
+              </a:ext>
+            </a:extLst>
+          </p:cNvPr>
+          <p:cNvSpPr txBox="1"/>
+          <p:nvPr/>
+        </p:nvSpPr>
+        <p:spPr>
+          <a:xfrm>
+            <a:off x="217714" y="255046"/>
+            <a:ext cx="11756571" cy="355354"/>
+          </a:xfrm>
+          <a:prstGeom prst="rect">
+            <a:avLst/>
+          </a:prstGeom>
+          <a:noFill/>
+        </p:spPr>
+        <p:txBody>
+          <a:bodyPr wrap="square">
+            <a:spAutoFit/>
+          </a:bodyPr>
+          <a:lstStyle/>
+          <a:p>
+            <a:pPr>
+              <a:lnSpc>
+                <a:spcPct val="150000"/>
+              </a:lnSpc>
+              <a:buNone/>
+            </a:pPr>
+            <a:r>
+              <a:rPr kumimoji="0" lang="en-US" altLang="en-US" sz="1300" b="0" i="0" u="none" strike="noStrike" cap="none" normalizeH="0" baseline="0">
+                <a:ln>
+                  <a:noFill/>
+                </a:ln>
+                <a:solidFill>
+                  <a:schemeClr val="tx1"/>
+                </a:solidFill>
+                <a:effectLst/>
+                <a:latin typeface="Arial" panose="020B0604020202020204" pitchFamily="34" charset="0"/>
+              </a:rPr>
+              <a:t>.</a:t>
+            </a:r>
+          </a:p>
+        </p:txBody>
+      </p:sp>
+    </p:spTree>
+    <p:extLst>
+      <p:ext uri="{BB962C8B-B14F-4D97-AF65-F5344CB8AC3E}">
+        <p14:creationId xmlns:p14="http://schemas.microsoft.com/office/powerpoint/2010/main" val="3587388628"/>
+      </p:ext>
+    </p:extLst>
+  </p:cSld>
+  <p:clrMapOvr>
+    <a:masterClrMapping/>
+  </p:clrMapOvr>
+</p:sld>
+</file>
+
+<file path=ppt/slides/slide2.xml><?xml version="1.0" encoding="utf-8"?>
+<p:sld xmlns:a="http://schemas.openxmlformats.org/drawingml/2006/main" xmlns:r="http://schemas.openxmlformats.org/officeDocument/2006/relationships" xmlns:p="http://schemas.openxmlformats.org/presentationml/2006/main">
+  <p:cSld>
+    <p:spTree>
+      <p:nvGrpSpPr>
+        <p:cNvPr id="1" name="">
+          <a:extLst>
+            <a:ext uri="{FF2B5EF4-FFF2-40B4-BE49-F238E27FC236}">
+              <a16:creationId xmlns:a16="http://schemas.microsoft.com/office/drawing/2014/main" id="{66C4065A-A922-D26B-7149-D27A23FC3B45}"/>
+            </a:ext>
+          </a:extLst>
+        </p:cNvPr>
+        <p:cNvGrpSpPr/>
+        <p:nvPr/>
+      </p:nvGrpSpPr>
+      <p:grpSpPr>
+        <a:xfrm>
+          <a:off x="0" y="0"/>
+          <a:ext cx="0" cy="0"/>
+          <a:chOff x="0" y="0"/>
+          <a:chExt cx="0" cy="0"/>
+        </a:xfrm>
+      </p:grpSpPr>
+      <p:sp>
+        <p:nvSpPr>
+          <p:cNvPr id="3" name="TextBox 2">
+            <a:extLst>
+              <a:ext uri="{FF2B5EF4-FFF2-40B4-BE49-F238E27FC236}">
+                <a16:creationId xmlns:a16="http://schemas.microsoft.com/office/drawing/2014/main" id="{8D68FE15-22EB-79A7-F6F8-DC965FB0466B}"/>
+              </a:ext>
+            </a:extLst>
+          </p:cNvPr>
+          <p:cNvSpPr txBox="1"/>
+          <p:nvPr/>
+        </p:nvSpPr>
+        <p:spPr>
+          <a:xfrm>
+            <a:off x="217714" y="255046"/>
+            <a:ext cx="11756571" cy="1255600"/>
+          </a:xfrm>
+          <a:prstGeom prst="rect">
+            <a:avLst/>
+          </a:prstGeom>
+          <a:noFill/>
+        </p:spPr>
+        <p:txBody>
+          <a:bodyPr wrap="square">
+            <a:spAutoFit/>
+          </a:bodyPr>
+          <a:lstStyle/>
+          <a:p>
+            <a:pPr>
+              <a:lnSpc>
+                <a:spcPct val="150000"/>
+              </a:lnSpc>
+              <a:buNone/>
+            </a:pPr>
+            <a:r>
+              <a:rPr lang="az-Latn-AZ" altLang="en-US" sz="1300">
+                <a:latin typeface="Arial" panose="020B0604020202020204" pitchFamily="34" charset="0"/>
+              </a:rPr>
+              <a:t>İndi daxil oluruq `</a:t>
+            </a:r>
+            <a:r>
+              <a:rPr lang="az-Latn-AZ" altLang="en-US" sz="1300" b="1">
+                <a:latin typeface="Arial" panose="020B0604020202020204" pitchFamily="34" charset="0"/>
+              </a:rPr>
+              <a:t>app\DataTables\</a:t>
+            </a:r>
+            <a:r>
+              <a:rPr lang="az-Latn-AZ" altLang="en-US" sz="1300" b="1" u="sng">
+                <a:latin typeface="Arial" panose="020B0604020202020204" pitchFamily="34" charset="0"/>
+              </a:rPr>
+              <a:t>SliderDataTable.php</a:t>
+            </a:r>
+            <a:r>
+              <a:rPr lang="az-Latn-AZ" altLang="en-US" sz="1300">
+                <a:latin typeface="Arial" panose="020B0604020202020204" pitchFamily="34" charset="0"/>
+              </a:rPr>
+              <a:t>` faylına və </a:t>
+            </a:r>
+            <a:r>
+              <a:rPr lang="az-Latn-AZ" altLang="en-US" sz="1300" b="1">
+                <a:latin typeface="Arial" panose="020B0604020202020204" pitchFamily="34" charset="0"/>
+              </a:rPr>
+              <a:t>delete</a:t>
+            </a:r>
+            <a:r>
+              <a:rPr lang="az-Latn-AZ" altLang="en-US" sz="1300">
+                <a:latin typeface="Arial" panose="020B0604020202020204" pitchFamily="34" charset="0"/>
+              </a:rPr>
+              <a:t> edən </a:t>
+            </a:r>
+            <a:r>
+              <a:rPr lang="az-Latn-AZ" altLang="en-US" sz="1300" b="1">
+                <a:solidFill>
+                  <a:srgbClr val="FF0000"/>
+                </a:solidFill>
+                <a:latin typeface="Arial" panose="020B0604020202020204" pitchFamily="34" charset="0"/>
+              </a:rPr>
+              <a:t>a</a:t>
+            </a:r>
+            <a:r>
+              <a:rPr lang="az-Latn-AZ" altLang="en-US" sz="1300">
+                <a:latin typeface="Arial" panose="020B0604020202020204" pitchFamily="34" charset="0"/>
+              </a:rPr>
+              <a:t> elementinə özümüzdən bir </a:t>
+            </a:r>
+            <a:r>
+              <a:rPr lang="az-Latn-AZ" altLang="en-US" sz="1300" b="1">
+                <a:latin typeface="Arial" panose="020B0604020202020204" pitchFamily="34" charset="0"/>
+              </a:rPr>
+              <a:t>class</a:t>
+            </a:r>
+            <a:r>
+              <a:rPr lang="az-Latn-AZ" altLang="en-US" sz="1300">
+                <a:latin typeface="Arial" panose="020B0604020202020204" pitchFamily="34" charset="0"/>
+              </a:rPr>
+              <a:t> adı əlavə edirik:  `</a:t>
+            </a:r>
+            <a:r>
+              <a:rPr lang="az-Latn-AZ" altLang="en-US" sz="1300" b="1">
+                <a:solidFill>
+                  <a:srgbClr val="0070C0"/>
+                </a:solidFill>
+                <a:latin typeface="Arial" panose="020B0604020202020204" pitchFamily="34" charset="0"/>
+              </a:rPr>
+              <a:t>delete-item</a:t>
+            </a:r>
+            <a:r>
+              <a:rPr lang="az-Latn-AZ" altLang="en-US" sz="1300">
+                <a:latin typeface="Arial" panose="020B0604020202020204" pitchFamily="34" charset="0"/>
+              </a:rPr>
+              <a:t>`. </a:t>
+            </a:r>
+          </a:p>
+          <a:p>
+            <a:pPr>
+              <a:lnSpc>
+                <a:spcPct val="150000"/>
+              </a:lnSpc>
+              <a:buNone/>
+            </a:pPr>
+            <a:r>
+              <a:rPr kumimoji="0" lang="az-Latn-AZ" altLang="en-US" sz="1300" b="0" i="0" u="none" strike="noStrike" cap="none" normalizeH="0" baseline="0">
+                <a:ln>
+                  <a:noFill/>
+                </a:ln>
+                <a:solidFill>
+                  <a:schemeClr val="tx1"/>
+                </a:solidFill>
+                <a:effectLst/>
+                <a:latin typeface="Arial" panose="020B0604020202020204" pitchFamily="34" charset="0"/>
+              </a:rPr>
+              <a:t>Həmin </a:t>
+            </a:r>
+            <a:r>
+              <a:rPr kumimoji="0" lang="az-Latn-AZ" altLang="en-US" sz="1300" b="1" i="0" u="none" strike="noStrike" cap="none" normalizeH="0" baseline="0">
+                <a:ln>
+                  <a:noFill/>
+                </a:ln>
+                <a:solidFill>
+                  <a:schemeClr val="tx1"/>
+                </a:solidFill>
+                <a:effectLst/>
+                <a:latin typeface="Arial" panose="020B0604020202020204" pitchFamily="34" charset="0"/>
+              </a:rPr>
+              <a:t>class</a:t>
+            </a:r>
+            <a:r>
+              <a:rPr kumimoji="0" lang="az-Latn-AZ" altLang="en-US" sz="1300" b="0" i="0" u="none" strike="noStrike" cap="none" normalizeH="0" baseline="0">
+                <a:ln>
+                  <a:noFill/>
+                </a:ln>
+                <a:solidFill>
+                  <a:schemeClr val="tx1"/>
+                </a:solidFill>
+                <a:effectLst/>
+                <a:latin typeface="Arial" panose="020B0604020202020204" pitchFamily="34" charset="0"/>
+              </a:rPr>
+              <a:t> adı vasitəsi ilə bu </a:t>
+            </a:r>
+            <a:r>
+              <a:rPr kumimoji="0" lang="az-Latn-AZ" altLang="en-US" sz="1300" b="1" i="0" u="none" strike="noStrike" cap="none" normalizeH="0" baseline="0">
+                <a:ln>
+                  <a:noFill/>
+                </a:ln>
+                <a:solidFill>
+                  <a:srgbClr val="FF0000"/>
+                </a:solidFill>
+                <a:effectLst/>
+                <a:latin typeface="Arial" panose="020B0604020202020204" pitchFamily="34" charset="0"/>
+              </a:rPr>
+              <a:t>a </a:t>
+            </a:r>
+            <a:r>
+              <a:rPr kumimoji="0" lang="az-Latn-AZ" altLang="en-US" sz="1300" b="0" i="0" u="none" strike="noStrike" cap="none" normalizeH="0" baseline="0">
+                <a:ln>
+                  <a:noFill/>
+                </a:ln>
+                <a:solidFill>
+                  <a:schemeClr val="tx1"/>
+                </a:solidFill>
+                <a:effectLst/>
+                <a:latin typeface="Arial" panose="020B0604020202020204" pitchFamily="34" charset="0"/>
+              </a:rPr>
+              <a:t>elementi üçün </a:t>
+            </a:r>
+            <a:r>
+              <a:rPr kumimoji="0" lang="az-Latn-AZ" altLang="en-US" sz="1300" b="1" i="0" u="none" strike="noStrike" cap="none" normalizeH="0" baseline="0">
+                <a:ln>
+                  <a:noFill/>
+                </a:ln>
+                <a:solidFill>
+                  <a:schemeClr val="tx1"/>
+                </a:solidFill>
+                <a:effectLst/>
+                <a:latin typeface="Arial" panose="020B0604020202020204" pitchFamily="34" charset="0"/>
+              </a:rPr>
+              <a:t>event</a:t>
+            </a:r>
+            <a:r>
+              <a:rPr kumimoji="0" lang="az-Latn-AZ" altLang="en-US" sz="1300" b="0" i="0" u="none" strike="noStrike" cap="none" normalizeH="0" baseline="0">
+                <a:ln>
+                  <a:noFill/>
+                </a:ln>
+                <a:solidFill>
+                  <a:schemeClr val="tx1"/>
+                </a:solidFill>
+                <a:effectLst/>
+                <a:latin typeface="Arial" panose="020B0604020202020204" pitchFamily="34" charset="0"/>
+              </a:rPr>
+              <a:t> yaradırıq `</a:t>
+            </a:r>
+            <a:r>
+              <a:rPr lang="en-US" altLang="en-US" sz="1300" b="1">
+                <a:latin typeface="Arial" panose="020B0604020202020204" pitchFamily="34" charset="0"/>
+              </a:rPr>
+              <a:t>resources\views\admin\layouts\</a:t>
+            </a:r>
+            <a:r>
+              <a:rPr lang="en-US" altLang="en-US" sz="1300" b="1" u="sng">
+                <a:latin typeface="Arial" panose="020B0604020202020204" pitchFamily="34" charset="0"/>
+              </a:rPr>
+              <a:t>master.blade.php</a:t>
+            </a:r>
+            <a:r>
+              <a:rPr kumimoji="0" lang="az-Latn-AZ" altLang="en-US" sz="1300" b="0" i="0" u="none" strike="noStrike" cap="none" normalizeH="0" baseline="0">
+                <a:ln>
+                  <a:noFill/>
+                </a:ln>
+                <a:solidFill>
+                  <a:schemeClr val="tx1"/>
+                </a:solidFill>
+                <a:effectLst/>
+                <a:latin typeface="Arial" panose="020B0604020202020204" pitchFamily="34" charset="0"/>
+              </a:rPr>
+              <a:t>` faylında.</a:t>
+            </a:r>
+          </a:p>
+          <a:p>
+            <a:pPr>
+              <a:lnSpc>
+                <a:spcPct val="150000"/>
+              </a:lnSpc>
+              <a:buNone/>
+            </a:pPr>
+            <a:endParaRPr lang="az-Latn-AZ" altLang="en-US" sz="1300">
+              <a:latin typeface="Arial" panose="020B0604020202020204" pitchFamily="34" charset="0"/>
+            </a:endParaRPr>
+          </a:p>
+          <a:p>
+            <a:pPr>
+              <a:lnSpc>
+                <a:spcPct val="150000"/>
+              </a:lnSpc>
+              <a:buNone/>
+            </a:pPr>
+            <a:r>
+              <a:rPr lang="az-Latn-AZ" altLang="en-US" sz="1300" b="1">
+                <a:latin typeface="Arial" panose="020B0604020202020204" pitchFamily="34" charset="0"/>
+              </a:rPr>
+              <a:t>DELETE</a:t>
+            </a:r>
+            <a:r>
+              <a:rPr lang="az-Latn-AZ" altLang="en-US" sz="1300">
+                <a:latin typeface="Arial" panose="020B0604020202020204" pitchFamily="34" charset="0"/>
+              </a:rPr>
+              <a:t> düyməsi klikləndikdə isə, `</a:t>
+            </a:r>
+            <a:r>
+              <a:rPr lang="az-Latn-AZ" altLang="en-US" sz="1300" b="1">
+                <a:latin typeface="Arial" panose="020B0604020202020204" pitchFamily="34" charset="0"/>
+              </a:rPr>
+              <a:t>sweetalert2</a:t>
+            </a:r>
+            <a:r>
+              <a:rPr lang="az-Latn-AZ" altLang="en-US" sz="1300">
+                <a:latin typeface="Arial" panose="020B0604020202020204" pitchFamily="34" charset="0"/>
+              </a:rPr>
+              <a:t>` saytından götürdüyümüz kodlar çağrılacaq və </a:t>
+            </a:r>
+            <a:r>
+              <a:rPr lang="az-Latn-AZ" altLang="en-US" sz="1300" b="1">
+                <a:latin typeface="Arial" panose="020B0604020202020204" pitchFamily="34" charset="0"/>
+              </a:rPr>
+              <a:t>kontrollerə</a:t>
+            </a:r>
+            <a:r>
+              <a:rPr lang="az-Latn-AZ" altLang="en-US" sz="1300">
+                <a:latin typeface="Arial" panose="020B0604020202020204" pitchFamily="34" charset="0"/>
+              </a:rPr>
+              <a:t> </a:t>
+            </a:r>
+            <a:r>
+              <a:rPr lang="az-Latn-AZ" altLang="en-US" sz="1300" b="1">
+                <a:latin typeface="Arial" panose="020B0604020202020204" pitchFamily="34" charset="0"/>
+              </a:rPr>
+              <a:t>ajax</a:t>
+            </a:r>
+            <a:r>
+              <a:rPr lang="az-Latn-AZ" altLang="en-US" sz="1300">
+                <a:latin typeface="Arial" panose="020B0604020202020204" pitchFamily="34" charset="0"/>
+              </a:rPr>
+              <a:t> sorğu göndəriləcək. </a:t>
+            </a:r>
+          </a:p>
+        </p:txBody>
+      </p:sp>
+      <p:pic>
+        <p:nvPicPr>
+          <p:cNvPr id="4" name="Picture 3">
+            <a:extLst>
+              <a:ext uri="{FF2B5EF4-FFF2-40B4-BE49-F238E27FC236}">
+                <a16:creationId xmlns:a16="http://schemas.microsoft.com/office/drawing/2014/main" id="{46C9A614-BBF6-BC5E-39BB-9ED08E84DFAE}"/>
+              </a:ext>
+            </a:extLst>
+          </p:cNvPr>
+          <p:cNvPicPr>
+            <a:picLocks noChangeAspect="1"/>
+          </p:cNvPicPr>
+          <p:nvPr/>
+        </p:nvPicPr>
+        <p:blipFill>
+          <a:blip r:embed="rId2"/>
+          <a:stretch>
+            <a:fillRect/>
+          </a:stretch>
+        </p:blipFill>
+        <p:spPr>
+          <a:xfrm>
+            <a:off x="217714" y="2017607"/>
+            <a:ext cx="2423886" cy="1852301"/>
+          </a:xfrm>
+          <a:prstGeom prst="rect">
+            <a:avLst/>
+          </a:prstGeom>
+          <a:ln w="38100" cap="sq">
+            <a:solidFill>
+              <a:srgbClr val="000000"/>
+            </a:solidFill>
+            <a:prstDash val="solid"/>
+            <a:miter lim="800000"/>
+          </a:ln>
+          <a:effectLst>
+            <a:outerShdw blurRad="50800" dist="38100" dir="2700000" algn="tl" rotWithShape="0">
+              <a:srgbClr val="000000">
+                <a:alpha val="43000"/>
+              </a:srgbClr>
+            </a:outerShdw>
+          </a:effectLst>
+        </p:spPr>
+      </p:pic>
+      <p:pic>
+        <p:nvPicPr>
+          <p:cNvPr id="8" name="Picture 7">
+            <a:extLst>
+              <a:ext uri="{FF2B5EF4-FFF2-40B4-BE49-F238E27FC236}">
+                <a16:creationId xmlns:a16="http://schemas.microsoft.com/office/drawing/2014/main" id="{F32AA367-0926-B8D9-10C5-18271E9C5B70}"/>
+              </a:ext>
+            </a:extLst>
+          </p:cNvPr>
+          <p:cNvPicPr>
+            <a:picLocks noChangeAspect="1"/>
+          </p:cNvPicPr>
+          <p:nvPr/>
+        </p:nvPicPr>
+        <p:blipFill>
+          <a:blip r:embed="rId3"/>
+          <a:stretch>
+            <a:fillRect/>
+          </a:stretch>
+        </p:blipFill>
+        <p:spPr>
+          <a:xfrm>
+            <a:off x="3070094" y="2017606"/>
+            <a:ext cx="9121905" cy="4840393"/>
+          </a:xfrm>
+          <a:prstGeom prst="rect">
+            <a:avLst/>
+          </a:prstGeom>
+          <a:ln w="38100" cap="sq">
+            <a:solidFill>
+              <a:srgbClr val="000000"/>
+            </a:solidFill>
+            <a:prstDash val="solid"/>
+            <a:miter lim="800000"/>
+          </a:ln>
+          <a:effectLst>
+            <a:outerShdw blurRad="50800" dist="38100" dir="2700000" algn="tl" rotWithShape="0">
+              <a:srgbClr val="000000">
+                <a:alpha val="43000"/>
+              </a:srgbClr>
+            </a:outerShdw>
+          </a:effectLst>
+        </p:spPr>
+      </p:pic>
+    </p:spTree>
+    <p:extLst>
+      <p:ext uri="{BB962C8B-B14F-4D97-AF65-F5344CB8AC3E}">
+        <p14:creationId xmlns:p14="http://schemas.microsoft.com/office/powerpoint/2010/main" val="430368491"/>
+      </p:ext>
+    </p:extLst>
+  </p:cSld>
+  <p:clrMapOvr>
+    <a:masterClrMapping/>
+  </p:clrMapOvr>
+</p:sld>
+</file>
+
+<file path=ppt/slides/slide3.xml><?xml version="1.0" encoding="utf-8"?>
+<p:sld xmlns:a="http://schemas.openxmlformats.org/drawingml/2006/main" xmlns:r="http://schemas.openxmlformats.org/officeDocument/2006/relationships" xmlns:p="http://schemas.openxmlformats.org/presentationml/2006/main">
+  <p:cSld>
+    <p:spTree>
+      <p:nvGrpSpPr>
+        <p:cNvPr id="1" name="">
+          <a:extLst>
+            <a:ext uri="{FF2B5EF4-FFF2-40B4-BE49-F238E27FC236}">
+              <a16:creationId xmlns:a16="http://schemas.microsoft.com/office/drawing/2014/main" id="{D7AA0189-297B-EEB8-51F8-4A40C1A036EE}"/>
+            </a:ext>
+          </a:extLst>
+        </p:cNvPr>
+        <p:cNvGrpSpPr/>
+        <p:nvPr/>
+      </p:nvGrpSpPr>
+      <p:grpSpPr>
+        <a:xfrm>
+          <a:off x="0" y="0"/>
+          <a:ext cx="0" cy="0"/>
+          <a:chOff x="0" y="0"/>
+          <a:chExt cx="0" cy="0"/>
+        </a:xfrm>
+      </p:grpSpPr>
+      <p:sp>
+        <p:nvSpPr>
+          <p:cNvPr id="3" name="TextBox 2">
+            <a:extLst>
+              <a:ext uri="{FF2B5EF4-FFF2-40B4-BE49-F238E27FC236}">
+                <a16:creationId xmlns:a16="http://schemas.microsoft.com/office/drawing/2014/main" id="{284F2B36-E144-CE62-909E-903AE459AEED}"/>
+              </a:ext>
+            </a:extLst>
+          </p:cNvPr>
+          <p:cNvSpPr txBox="1"/>
+          <p:nvPr/>
+        </p:nvSpPr>
+        <p:spPr>
+          <a:xfrm>
+            <a:off x="217713" y="98028"/>
+            <a:ext cx="11756571" cy="655436"/>
+          </a:xfrm>
+          <a:prstGeom prst="rect">
+            <a:avLst/>
+          </a:prstGeom>
+          <a:noFill/>
+        </p:spPr>
+        <p:txBody>
+          <a:bodyPr wrap="square">
+            <a:spAutoFit/>
+          </a:bodyPr>
+          <a:lstStyle/>
+          <a:p>
+            <a:pPr>
+              <a:lnSpc>
+                <a:spcPct val="150000"/>
+              </a:lnSpc>
+              <a:buNone/>
+            </a:pPr>
+            <a:r>
+              <a:rPr lang="az-Latn-AZ" altLang="en-US" sz="1300">
+                <a:latin typeface="Arial" panose="020B0604020202020204" pitchFamily="34" charset="0"/>
+              </a:rPr>
+              <a:t>Test etmək üçün </a:t>
+            </a:r>
+            <a:r>
+              <a:rPr lang="az-Latn-AZ" altLang="en-US" sz="1300" b="1">
+                <a:latin typeface="Arial" panose="020B0604020202020204" pitchFamily="34" charset="0"/>
+              </a:rPr>
+              <a:t>DELETE</a:t>
+            </a:r>
+            <a:r>
+              <a:rPr lang="az-Latn-AZ" altLang="en-US" sz="1300">
+                <a:latin typeface="Arial" panose="020B0604020202020204" pitchFamily="34" charset="0"/>
+              </a:rPr>
+              <a:t> düyməsini klikləyirik və şəkildəki kimi bir xəta görəcəyik: </a:t>
+            </a:r>
+            <a:r>
+              <a:rPr lang="az-Latn-AZ" altLang="en-US" sz="1300" b="1">
+                <a:latin typeface="Arial" panose="020B0604020202020204" pitchFamily="34" charset="0"/>
+              </a:rPr>
+              <a:t>CSRF token</a:t>
+            </a:r>
+            <a:r>
+              <a:rPr lang="az-Latn-AZ" altLang="en-US" sz="1300">
+                <a:latin typeface="Arial" panose="020B0604020202020204" pitchFamily="34" charset="0"/>
+              </a:rPr>
+              <a:t> xətası. Laravel-də </a:t>
+            </a:r>
+            <a:r>
+              <a:rPr lang="az-Latn-AZ" altLang="en-US" sz="1300" b="1">
+                <a:latin typeface="Arial" panose="020B0604020202020204" pitchFamily="34" charset="0"/>
+              </a:rPr>
+              <a:t>AJAX</a:t>
+            </a:r>
+            <a:r>
+              <a:rPr lang="az-Latn-AZ" altLang="en-US" sz="1300">
+                <a:latin typeface="Arial" panose="020B0604020202020204" pitchFamily="34" charset="0"/>
+              </a:rPr>
+              <a:t> ilə </a:t>
+            </a:r>
+            <a:r>
+              <a:rPr lang="az-Latn-AZ" altLang="en-US" sz="1300" b="1">
+                <a:latin typeface="Arial" panose="020B0604020202020204" pitchFamily="34" charset="0"/>
+              </a:rPr>
+              <a:t>DELETE</a:t>
+            </a:r>
+            <a:r>
+              <a:rPr lang="az-Latn-AZ" altLang="en-US" sz="1300">
+                <a:latin typeface="Arial" panose="020B0604020202020204" pitchFamily="34" charset="0"/>
+              </a:rPr>
+              <a:t> etmək üçün </a:t>
+            </a:r>
+            <a:r>
+              <a:rPr lang="az-Latn-AZ" altLang="en-US" sz="1300" b="1">
+                <a:latin typeface="Arial" panose="020B0604020202020204" pitchFamily="34" charset="0"/>
+              </a:rPr>
+              <a:t>CSRF</a:t>
+            </a:r>
+            <a:r>
+              <a:rPr lang="az-Latn-AZ" altLang="en-US" sz="1300">
+                <a:latin typeface="Arial" panose="020B0604020202020204" pitchFamily="34" charset="0"/>
+              </a:rPr>
+              <a:t> </a:t>
+            </a:r>
+            <a:r>
+              <a:rPr lang="az-Latn-AZ" altLang="en-US" sz="1300" b="1">
+                <a:latin typeface="Arial" panose="020B0604020202020204" pitchFamily="34" charset="0"/>
+              </a:rPr>
+              <a:t>token</a:t>
+            </a:r>
+            <a:r>
+              <a:rPr lang="az-Latn-AZ" altLang="en-US" sz="1300">
+                <a:latin typeface="Arial" panose="020B0604020202020204" pitchFamily="34" charset="0"/>
+              </a:rPr>
+              <a:t> göndərməlisən. Əks halda </a:t>
+            </a:r>
+            <a:r>
+              <a:rPr lang="az-Latn-AZ" altLang="en-US" sz="1300" b="1">
+                <a:latin typeface="Arial" panose="020B0604020202020204" pitchFamily="34" charset="0"/>
+              </a:rPr>
+              <a:t>Laravel 419 (Page Expired) </a:t>
+            </a:r>
+            <a:r>
+              <a:rPr lang="az-Latn-AZ" altLang="en-US" sz="1300">
+                <a:latin typeface="Arial" panose="020B0604020202020204" pitchFamily="34" charset="0"/>
+              </a:rPr>
+              <a:t>xətası qaytaracaq.</a:t>
+            </a:r>
+            <a:endParaRPr kumimoji="0" lang="en-US" altLang="en-US" sz="1300" b="0" i="0" u="none" strike="noStrike" cap="none" normalizeH="0" baseline="0">
+              <a:ln>
+                <a:noFill/>
+              </a:ln>
+              <a:solidFill>
+                <a:schemeClr val="tx1"/>
+              </a:solidFill>
+              <a:effectLst/>
+              <a:latin typeface="Arial" panose="020B0604020202020204" pitchFamily="34" charset="0"/>
+            </a:endParaRPr>
+          </a:p>
+        </p:txBody>
+      </p:sp>
+      <p:pic>
+        <p:nvPicPr>
+          <p:cNvPr id="4" name="Picture 3">
+            <a:extLst>
+              <a:ext uri="{FF2B5EF4-FFF2-40B4-BE49-F238E27FC236}">
+                <a16:creationId xmlns:a16="http://schemas.microsoft.com/office/drawing/2014/main" id="{64380D54-3D26-50AD-2693-70B74B90D1E0}"/>
+              </a:ext>
+            </a:extLst>
+          </p:cNvPr>
+          <p:cNvPicPr>
+            <a:picLocks noChangeAspect="1"/>
+          </p:cNvPicPr>
+          <p:nvPr/>
+        </p:nvPicPr>
+        <p:blipFill>
+          <a:blip r:embed="rId2"/>
+          <a:stretch>
+            <a:fillRect/>
+          </a:stretch>
+        </p:blipFill>
+        <p:spPr>
+          <a:xfrm>
+            <a:off x="-1" y="860476"/>
+            <a:ext cx="12192000" cy="5997524"/>
+          </a:xfrm>
+          <a:prstGeom prst="rect">
+            <a:avLst/>
+          </a:prstGeom>
+        </p:spPr>
+      </p:pic>
+    </p:spTree>
+    <p:extLst>
+      <p:ext uri="{BB962C8B-B14F-4D97-AF65-F5344CB8AC3E}">
+        <p14:creationId xmlns:p14="http://schemas.microsoft.com/office/powerpoint/2010/main" val="2869775813"/>
+      </p:ext>
+    </p:extLst>
+  </p:cSld>
+  <p:clrMapOvr>
+    <a:masterClrMapping/>
+  </p:clrMapOvr>
+</p:sld>
+</file>
+
+<file path=ppt/slides/slide4.xml><?xml version="1.0" encoding="utf-8"?>
+<p:sld xmlns:a="http://schemas.openxmlformats.org/drawingml/2006/main" xmlns:r="http://schemas.openxmlformats.org/officeDocument/2006/relationships" xmlns:p="http://schemas.openxmlformats.org/presentationml/2006/main">
+  <p:cSld>
+    <p:spTree>
+      <p:nvGrpSpPr>
+        <p:cNvPr id="1" name="">
+          <a:extLst>
+            <a:ext uri="{FF2B5EF4-FFF2-40B4-BE49-F238E27FC236}">
+              <a16:creationId xmlns:a16="http://schemas.microsoft.com/office/drawing/2014/main" id="{167F9064-2E4A-71C6-49F2-D83C7A66F9E7}"/>
+            </a:ext>
+          </a:extLst>
+        </p:cNvPr>
+        <p:cNvGrpSpPr/>
+        <p:nvPr/>
+      </p:nvGrpSpPr>
+      <p:grpSpPr>
+        <a:xfrm>
+          <a:off x="0" y="0"/>
+          <a:ext cx="0" cy="0"/>
+          <a:chOff x="0" y="0"/>
+          <a:chExt cx="0" cy="0"/>
+        </a:xfrm>
+      </p:grpSpPr>
+      <p:sp>
+        <p:nvSpPr>
+          <p:cNvPr id="3" name="TextBox 2">
+            <a:extLst>
+              <a:ext uri="{FF2B5EF4-FFF2-40B4-BE49-F238E27FC236}">
+                <a16:creationId xmlns:a16="http://schemas.microsoft.com/office/drawing/2014/main" id="{B032846E-C98F-D606-9B6B-2EBAA3F8439E}"/>
+              </a:ext>
+            </a:extLst>
+          </p:cNvPr>
+          <p:cNvSpPr txBox="1"/>
+          <p:nvPr/>
+        </p:nvSpPr>
+        <p:spPr>
+          <a:xfrm>
+            <a:off x="217714" y="255046"/>
+            <a:ext cx="11756571" cy="355354"/>
+          </a:xfrm>
+          <a:prstGeom prst="rect">
+            <a:avLst/>
+          </a:prstGeom>
+          <a:noFill/>
+        </p:spPr>
+        <p:txBody>
+          <a:bodyPr wrap="square">
+            <a:spAutoFit/>
+          </a:bodyPr>
+          <a:lstStyle/>
+          <a:p>
+            <a:pPr>
+              <a:lnSpc>
+                <a:spcPct val="150000"/>
+              </a:lnSpc>
+              <a:buNone/>
+            </a:pPr>
+            <a:r>
+              <a:rPr kumimoji="0" lang="en-US" altLang="en-US" sz="1300" b="0" i="0" u="none" strike="noStrike" cap="none" normalizeH="0" baseline="0">
+                <a:ln>
+                  <a:noFill/>
+                </a:ln>
+                <a:solidFill>
+                  <a:schemeClr val="tx1"/>
+                </a:solidFill>
+                <a:effectLst/>
+                <a:latin typeface="Arial" panose="020B0604020202020204" pitchFamily="34" charset="0"/>
+              </a:rPr>
+              <a:t>.</a:t>
+            </a:r>
+          </a:p>
+        </p:txBody>
+      </p:sp>
+      <p:pic>
+        <p:nvPicPr>
+          <p:cNvPr id="4" name="Picture 3">
+            <a:extLst>
+              <a:ext uri="{FF2B5EF4-FFF2-40B4-BE49-F238E27FC236}">
+                <a16:creationId xmlns:a16="http://schemas.microsoft.com/office/drawing/2014/main" id="{A36CADCD-5B14-9D5E-A8EF-50B92B8C1E9C}"/>
+              </a:ext>
+            </a:extLst>
+          </p:cNvPr>
+          <p:cNvPicPr>
+            <a:picLocks noChangeAspect="1"/>
+          </p:cNvPicPr>
+          <p:nvPr/>
+        </p:nvPicPr>
+        <p:blipFill>
+          <a:blip r:embed="rId2"/>
+          <a:stretch>
+            <a:fillRect/>
+          </a:stretch>
+        </p:blipFill>
+        <p:spPr>
+          <a:xfrm>
+            <a:off x="3017480" y="0"/>
+            <a:ext cx="9174520" cy="6858000"/>
+          </a:xfrm>
+          <a:prstGeom prst="rect">
+            <a:avLst/>
+          </a:prstGeom>
+        </p:spPr>
+      </p:pic>
+    </p:spTree>
+    <p:extLst>
+      <p:ext uri="{BB962C8B-B14F-4D97-AF65-F5344CB8AC3E}">
+        <p14:creationId xmlns:p14="http://schemas.microsoft.com/office/powerpoint/2010/main" val="2659392192"/>
+      </p:ext>
+    </p:extLst>
+  </p:cSld>
+  <p:clrMapOvr>
+    <a:masterClrMapping/>
+  </p:clrMapOvr>
+</p:sld>
+</file>
+
+<file path=ppt/slides/slide5.xml><?xml version="1.0" encoding="utf-8"?>
+<p:sld xmlns:a="http://schemas.openxmlformats.org/drawingml/2006/main" xmlns:r="http://schemas.openxmlformats.org/officeDocument/2006/relationships" xmlns:p="http://schemas.openxmlformats.org/presentationml/2006/main">
+  <p:cSld>
+    <p:spTree>
+      <p:nvGrpSpPr>
+        <p:cNvPr id="1" name="">
+          <a:extLst>
+            <a:ext uri="{FF2B5EF4-FFF2-40B4-BE49-F238E27FC236}">
+              <a16:creationId xmlns:a16="http://schemas.microsoft.com/office/drawing/2014/main" id="{42D0757D-A8C8-F5CD-A01D-BA564FFBBA97}"/>
+            </a:ext>
+          </a:extLst>
+        </p:cNvPr>
+        <p:cNvGrpSpPr/>
+        <p:nvPr/>
+      </p:nvGrpSpPr>
+      <p:grpSpPr>
+        <a:xfrm>
+          <a:off x="0" y="0"/>
+          <a:ext cx="0" cy="0"/>
+          <a:chOff x="0" y="0"/>
+          <a:chExt cx="0" cy="0"/>
+        </a:xfrm>
+      </p:grpSpPr>
+      <p:sp>
+        <p:nvSpPr>
+          <p:cNvPr id="3" name="TextBox 2">
+            <a:extLst>
+              <a:ext uri="{FF2B5EF4-FFF2-40B4-BE49-F238E27FC236}">
+                <a16:creationId xmlns:a16="http://schemas.microsoft.com/office/drawing/2014/main" id="{0A8F5BAE-E2F8-F48F-95D7-7835A7EADCAB}"/>
+              </a:ext>
+            </a:extLst>
+          </p:cNvPr>
+          <p:cNvSpPr txBox="1"/>
+          <p:nvPr/>
+        </p:nvSpPr>
+        <p:spPr>
+          <a:xfrm>
+            <a:off x="217714" y="255046"/>
+            <a:ext cx="11756571" cy="355354"/>
+          </a:xfrm>
+          <a:prstGeom prst="rect">
+            <a:avLst/>
+          </a:prstGeom>
+          <a:noFill/>
+        </p:spPr>
+        <p:txBody>
+          <a:bodyPr wrap="square">
+            <a:spAutoFit/>
+          </a:bodyPr>
+          <a:lstStyle/>
+          <a:p>
+            <a:pPr>
+              <a:lnSpc>
+                <a:spcPct val="150000"/>
+              </a:lnSpc>
+              <a:buNone/>
+            </a:pPr>
+            <a:r>
+              <a:rPr lang="az-Latn-AZ" altLang="en-US" sz="1300" b="1">
+                <a:latin typeface="Arial" panose="020B0604020202020204" pitchFamily="34" charset="0"/>
+              </a:rPr>
+              <a:t>HEADER</a:t>
+            </a:r>
+            <a:r>
+              <a:rPr lang="az-Latn-AZ" altLang="en-US" sz="1300">
+                <a:latin typeface="Arial" panose="020B0604020202020204" pitchFamily="34" charset="0"/>
+              </a:rPr>
+              <a:t> başlığı əlavə edirik.</a:t>
+            </a:r>
+            <a:endParaRPr kumimoji="0" lang="en-US" altLang="en-US" sz="1300" b="0" i="0" u="none" strike="noStrike" cap="none" normalizeH="0" baseline="0">
+              <a:ln>
+                <a:noFill/>
+              </a:ln>
+              <a:solidFill>
+                <a:schemeClr val="tx1"/>
+              </a:solidFill>
+              <a:effectLst/>
+              <a:latin typeface="Arial" panose="020B0604020202020204" pitchFamily="34" charset="0"/>
+            </a:endParaRPr>
+          </a:p>
+        </p:txBody>
+      </p:sp>
+      <p:pic>
+        <p:nvPicPr>
+          <p:cNvPr id="4" name="Picture 3">
+            <a:extLst>
+              <a:ext uri="{FF2B5EF4-FFF2-40B4-BE49-F238E27FC236}">
+                <a16:creationId xmlns:a16="http://schemas.microsoft.com/office/drawing/2014/main" id="{1D3C4B0A-11B1-9BF8-4852-1D0378CA8E21}"/>
+              </a:ext>
+            </a:extLst>
+          </p:cNvPr>
+          <p:cNvPicPr>
+            <a:picLocks noChangeAspect="1"/>
+          </p:cNvPicPr>
+          <p:nvPr/>
+        </p:nvPicPr>
+        <p:blipFill>
+          <a:blip r:embed="rId2"/>
+          <a:stretch>
+            <a:fillRect/>
+          </a:stretch>
+        </p:blipFill>
+        <p:spPr>
+          <a:xfrm>
+            <a:off x="6747588" y="0"/>
+            <a:ext cx="5444412" cy="6858000"/>
+          </a:xfrm>
+          <a:prstGeom prst="rect">
+            <a:avLst/>
+          </a:prstGeom>
+        </p:spPr>
+      </p:pic>
+    </p:spTree>
+    <p:extLst>
+      <p:ext uri="{BB962C8B-B14F-4D97-AF65-F5344CB8AC3E}">
+        <p14:creationId xmlns:p14="http://schemas.microsoft.com/office/powerpoint/2010/main" val="3830669244"/>
+      </p:ext>
+    </p:extLst>
+  </p:cSld>
+  <p:clrMapOvr>
+    <a:masterClrMapping/>
+  </p:clrMapOvr>
+</p:sld>
+</file>
+
+<file path=ppt/slides/slide6.xml><?xml version="1.0" encoding="utf-8"?>
+<p:sld xmlns:a="http://schemas.openxmlformats.org/drawingml/2006/main" xmlns:r="http://schemas.openxmlformats.org/officeDocument/2006/relationships" xmlns:p="http://schemas.openxmlformats.org/presentationml/2006/main">
+  <p:cSld>
+    <p:spTree>
+      <p:nvGrpSpPr>
+        <p:cNvPr id="1" name="">
+          <a:extLst>
+            <a:ext uri="{FF2B5EF4-FFF2-40B4-BE49-F238E27FC236}">
+              <a16:creationId xmlns:a16="http://schemas.microsoft.com/office/drawing/2014/main" id="{361D7801-0978-D0C3-6E1B-24D565880082}"/>
+            </a:ext>
+          </a:extLst>
+        </p:cNvPr>
+        <p:cNvGrpSpPr/>
+        <p:nvPr/>
+      </p:nvGrpSpPr>
+      <p:grpSpPr>
+        <a:xfrm>
+          <a:off x="0" y="0"/>
+          <a:ext cx="0" cy="0"/>
+          <a:chOff x="0" y="0"/>
+          <a:chExt cx="0" cy="0"/>
+        </a:xfrm>
+      </p:grpSpPr>
+      <p:sp>
+        <p:nvSpPr>
+          <p:cNvPr id="3" name="TextBox 2">
+            <a:extLst>
+              <a:ext uri="{FF2B5EF4-FFF2-40B4-BE49-F238E27FC236}">
+                <a16:creationId xmlns:a16="http://schemas.microsoft.com/office/drawing/2014/main" id="{BFADDCEE-93FE-F037-CCED-9F5EE6E1F467}"/>
+              </a:ext>
+            </a:extLst>
+          </p:cNvPr>
+          <p:cNvSpPr txBox="1"/>
+          <p:nvPr/>
+        </p:nvSpPr>
+        <p:spPr>
+          <a:xfrm>
+            <a:off x="217714" y="73737"/>
+            <a:ext cx="11756571" cy="355354"/>
+          </a:xfrm>
+          <a:prstGeom prst="rect">
+            <a:avLst/>
+          </a:prstGeom>
+          <a:noFill/>
+        </p:spPr>
+        <p:txBody>
+          <a:bodyPr wrap="square">
+            <a:spAutoFit/>
+          </a:bodyPr>
+          <a:lstStyle/>
+          <a:p>
+            <a:pPr>
+              <a:lnSpc>
+                <a:spcPct val="150000"/>
+              </a:lnSpc>
+              <a:buNone/>
+            </a:pPr>
+            <a:r>
+              <a:rPr lang="az-Latn-AZ" altLang="en-US" sz="1300">
+                <a:latin typeface="Arial" panose="020B0604020202020204" pitchFamily="34" charset="0"/>
+              </a:rPr>
+              <a:t>İndi AJAX soruğunun göndərilib - göndərilməyəcəyini birdə test edirik və status olaraq 200 görürüksə, deməkdir ki, hər şey qaydasındadır.</a:t>
+            </a:r>
+            <a:endParaRPr kumimoji="0" lang="en-US" altLang="en-US" sz="1300" b="0" i="0" u="none" strike="noStrike" cap="none" normalizeH="0" baseline="0">
+              <a:ln>
+                <a:noFill/>
+              </a:ln>
+              <a:solidFill>
+                <a:schemeClr val="tx1"/>
+              </a:solidFill>
+              <a:effectLst/>
+              <a:latin typeface="Arial" panose="020B0604020202020204" pitchFamily="34" charset="0"/>
+            </a:endParaRPr>
+          </a:p>
+        </p:txBody>
+      </p:sp>
+      <p:pic>
+        <p:nvPicPr>
+          <p:cNvPr id="4" name="Picture 3">
+            <a:extLst>
+              <a:ext uri="{FF2B5EF4-FFF2-40B4-BE49-F238E27FC236}">
+                <a16:creationId xmlns:a16="http://schemas.microsoft.com/office/drawing/2014/main" id="{4E937974-43CB-113A-B746-E7AAF4A7F246}"/>
+              </a:ext>
+            </a:extLst>
+          </p:cNvPr>
+          <p:cNvPicPr>
+            <a:picLocks noChangeAspect="1"/>
+          </p:cNvPicPr>
+          <p:nvPr/>
+        </p:nvPicPr>
+        <p:blipFill>
+          <a:blip r:embed="rId2"/>
+          <a:stretch>
+            <a:fillRect/>
+          </a:stretch>
+        </p:blipFill>
+        <p:spPr>
+          <a:xfrm>
+            <a:off x="0" y="549164"/>
+            <a:ext cx="12192000" cy="6308836"/>
+          </a:xfrm>
+          <a:prstGeom prst="rect">
+            <a:avLst/>
+          </a:prstGeom>
+        </p:spPr>
+      </p:pic>
+    </p:spTree>
+    <p:extLst>
+      <p:ext uri="{BB962C8B-B14F-4D97-AF65-F5344CB8AC3E}">
+        <p14:creationId xmlns:p14="http://schemas.microsoft.com/office/powerpoint/2010/main" val="1971562213"/>
+      </p:ext>
+    </p:extLst>
+  </p:cSld>
+  <p:clrMapOvr>
+    <a:masterClrMapping/>
+  </p:clrMapOvr>
+</p:sld>
+</file>
+
+<file path=ppt/slides/slide7.xml><?xml version="1.0" encoding="utf-8"?>
+<p:sld xmlns:a="http://schemas.openxmlformats.org/drawingml/2006/main" xmlns:r="http://schemas.openxmlformats.org/officeDocument/2006/relationships" xmlns:p="http://schemas.openxmlformats.org/presentationml/2006/main">
+  <p:cSld>
+    <p:spTree>
+      <p:nvGrpSpPr>
+        <p:cNvPr id="1" name="">
+          <a:extLst>
+            <a:ext uri="{FF2B5EF4-FFF2-40B4-BE49-F238E27FC236}">
+              <a16:creationId xmlns:a16="http://schemas.microsoft.com/office/drawing/2014/main" id="{302C0E0B-9499-75F1-E8F4-3DA57BBA7F89}"/>
+            </a:ext>
+          </a:extLst>
+        </p:cNvPr>
+        <p:cNvGrpSpPr/>
+        <p:nvPr/>
+      </p:nvGrpSpPr>
+      <p:grpSpPr>
+        <a:xfrm>
+          <a:off x="0" y="0"/>
+          <a:ext cx="0" cy="0"/>
+          <a:chOff x="0" y="0"/>
+          <a:chExt cx="0" cy="0"/>
+        </a:xfrm>
+      </p:grpSpPr>
+      <p:sp>
+        <p:nvSpPr>
+          <p:cNvPr id="3" name="TextBox 2">
+            <a:extLst>
+              <a:ext uri="{FF2B5EF4-FFF2-40B4-BE49-F238E27FC236}">
+                <a16:creationId xmlns:a16="http://schemas.microsoft.com/office/drawing/2014/main" id="{D91434BE-E5A5-36F8-CE41-54FED4571EB8}"/>
+              </a:ext>
+            </a:extLst>
+          </p:cNvPr>
+          <p:cNvSpPr txBox="1"/>
+          <p:nvPr/>
+        </p:nvSpPr>
+        <p:spPr>
+          <a:xfrm>
+            <a:off x="217714" y="255046"/>
+            <a:ext cx="11756571" cy="2155847"/>
+          </a:xfrm>
+          <a:prstGeom prst="rect">
+            <a:avLst/>
+          </a:prstGeom>
+          <a:noFill/>
+        </p:spPr>
+        <p:txBody>
+          <a:bodyPr wrap="square">
+            <a:spAutoFit/>
+          </a:bodyPr>
+          <a:lstStyle/>
+          <a:p>
+            <a:pPr>
+              <a:lnSpc>
+                <a:spcPct val="150000"/>
+              </a:lnSpc>
+              <a:buNone/>
+            </a:pPr>
+            <a:r>
+              <a:rPr kumimoji="0" lang="az-Latn-AZ" altLang="en-US" sz="1300" b="0" i="0" u="none" strike="noStrike" cap="none" normalizeH="0" baseline="0">
+                <a:ln>
+                  <a:noFill/>
+                </a:ln>
+                <a:solidFill>
+                  <a:schemeClr val="tx1"/>
+                </a:solidFill>
+                <a:effectLst/>
+                <a:latin typeface="Arial" panose="020B0604020202020204" pitchFamily="34" charset="0"/>
+              </a:rPr>
+              <a:t>AJAX sorğunun, kontrollerə </a:t>
+            </a:r>
+            <a:r>
+              <a:rPr kumimoji="0" lang="az-Latn-AZ" altLang="en-US" sz="1300" b="1" i="0" u="none" strike="noStrike" cap="none" normalizeH="0" baseline="0">
+                <a:ln>
+                  <a:noFill/>
+                </a:ln>
+                <a:solidFill>
+                  <a:schemeClr val="tx1"/>
+                </a:solidFill>
+                <a:effectLst/>
+                <a:latin typeface="Arial" panose="020B0604020202020204" pitchFamily="34" charset="0"/>
+              </a:rPr>
+              <a:t>data</a:t>
+            </a:r>
+            <a:r>
+              <a:rPr kumimoji="0" lang="az-Latn-AZ" altLang="en-US" sz="1300" b="0" i="0" u="none" strike="noStrike" cap="none" normalizeH="0" baseline="0">
+                <a:ln>
+                  <a:noFill/>
+                </a:ln>
+                <a:solidFill>
+                  <a:schemeClr val="tx1"/>
+                </a:solidFill>
+                <a:effectLst/>
+                <a:latin typeface="Arial" panose="020B0604020202020204" pitchFamily="34" charset="0"/>
+              </a:rPr>
+              <a:t> göndərib göndərmədiyini </a:t>
+            </a:r>
+            <a:r>
+              <a:rPr kumimoji="0" lang="az-Latn-AZ" altLang="en-US" sz="1300" b="1" i="0" u="none" strike="noStrike" cap="none" normalizeH="0" baseline="0">
+                <a:ln>
+                  <a:noFill/>
+                </a:ln>
+                <a:solidFill>
+                  <a:schemeClr val="tx1"/>
+                </a:solidFill>
+                <a:effectLst/>
+                <a:latin typeface="Arial" panose="020B0604020202020204" pitchFamily="34" charset="0"/>
+              </a:rPr>
+              <a:t>dd() </a:t>
+            </a:r>
+            <a:r>
+              <a:rPr kumimoji="0" lang="az-Latn-AZ" altLang="en-US" sz="1300" b="0" i="0" u="none" strike="noStrike" cap="none" normalizeH="0" baseline="0">
+                <a:ln>
+                  <a:noFill/>
+                </a:ln>
+                <a:solidFill>
+                  <a:schemeClr val="tx1"/>
+                </a:solidFill>
+                <a:effectLst/>
+                <a:latin typeface="Arial" panose="020B0604020202020204" pitchFamily="34" charset="0"/>
+              </a:rPr>
+              <a:t>əmri ilə də, test edirik.</a:t>
+            </a:r>
+            <a:endParaRPr kumimoji="0" lang="en-US" altLang="en-US" sz="1300" b="0" i="0" u="none" strike="noStrike" cap="none" normalizeH="0" baseline="0">
+              <a:ln>
+                <a:noFill/>
+              </a:ln>
+              <a:solidFill>
+                <a:schemeClr val="tx1"/>
+              </a:solidFill>
+              <a:effectLst/>
+              <a:latin typeface="Arial" panose="020B0604020202020204" pitchFamily="34" charset="0"/>
+            </a:endParaRPr>
+          </a:p>
+          <a:p>
+            <a:pPr>
+              <a:lnSpc>
+                <a:spcPct val="150000"/>
+              </a:lnSpc>
+              <a:buNone/>
+            </a:pPr>
+            <a:endParaRPr lang="en-US" altLang="en-US" sz="1300">
+              <a:latin typeface="Arial" panose="020B0604020202020204" pitchFamily="34" charset="0"/>
+            </a:endParaRPr>
+          </a:p>
+          <a:p>
+            <a:pPr>
+              <a:lnSpc>
+                <a:spcPct val="150000"/>
+              </a:lnSpc>
+              <a:buNone/>
+            </a:pPr>
+            <a:endParaRPr kumimoji="0" lang="en-US" altLang="en-US" sz="1300" b="0" i="0" u="none" strike="noStrike" cap="none" normalizeH="0" baseline="0">
+              <a:ln>
+                <a:noFill/>
+              </a:ln>
+              <a:solidFill>
+                <a:schemeClr val="tx1"/>
+              </a:solidFill>
+              <a:effectLst/>
+              <a:latin typeface="Arial" panose="020B0604020202020204" pitchFamily="34" charset="0"/>
+            </a:endParaRPr>
+          </a:p>
+          <a:p>
+            <a:pPr>
+              <a:lnSpc>
+                <a:spcPct val="150000"/>
+              </a:lnSpc>
+              <a:buNone/>
+            </a:pPr>
+            <a:r>
+              <a:rPr lang="en-US" altLang="en-US" sz="1300">
+                <a:latin typeface="Arial" panose="020B0604020202020204" pitchFamily="34" charset="0"/>
+              </a:rPr>
+              <a:t>Data </a:t>
+            </a:r>
+            <a:r>
+              <a:rPr lang="az-Latn-AZ" altLang="en-US" sz="1300">
+                <a:latin typeface="Arial" panose="020B0604020202020204" pitchFamily="34" charset="0"/>
+              </a:rPr>
+              <a:t>gəlir. </a:t>
+            </a:r>
+          </a:p>
+          <a:p>
+            <a:pPr>
+              <a:lnSpc>
+                <a:spcPct val="150000"/>
+              </a:lnSpc>
+              <a:buNone/>
+            </a:pPr>
+            <a:endParaRPr lang="az-Latn-AZ" altLang="en-US" sz="1300">
+              <a:latin typeface="Arial" panose="020B0604020202020204" pitchFamily="34" charset="0"/>
+            </a:endParaRPr>
+          </a:p>
+          <a:p>
+            <a:pPr>
+              <a:lnSpc>
+                <a:spcPct val="150000"/>
+              </a:lnSpc>
+              <a:buNone/>
+            </a:pPr>
+            <a:r>
+              <a:rPr lang="az-Latn-AZ" altLang="en-US" sz="1300">
+                <a:latin typeface="Arial" panose="020B0604020202020204" pitchFamily="34" charset="0"/>
+              </a:rPr>
+              <a:t>Növbəti slaydda isə həm </a:t>
+            </a:r>
+            <a:r>
+              <a:rPr lang="az-Latn-AZ" altLang="en-US" sz="1300" b="1">
+                <a:latin typeface="Arial" panose="020B0604020202020204" pitchFamily="34" charset="0"/>
+              </a:rPr>
+              <a:t>Storage</a:t>
+            </a:r>
+            <a:r>
+              <a:rPr lang="az-Latn-AZ" altLang="en-US" sz="1300">
+                <a:latin typeface="Arial" panose="020B0604020202020204" pitchFamily="34" charset="0"/>
+              </a:rPr>
+              <a:t> içindən şəkli, həmdə </a:t>
+            </a:r>
+            <a:r>
+              <a:rPr lang="az-Latn-AZ" altLang="en-US" sz="1300" b="1">
+                <a:latin typeface="Arial" panose="020B0604020202020204" pitchFamily="34" charset="0"/>
+              </a:rPr>
+              <a:t>Slider modelindən</a:t>
+            </a:r>
+          </a:p>
+          <a:p>
+            <a:pPr>
+              <a:lnSpc>
+                <a:spcPct val="150000"/>
+              </a:lnSpc>
+              <a:buNone/>
+            </a:pPr>
+            <a:r>
+              <a:rPr kumimoji="0" lang="az-Latn-AZ" altLang="en-US" sz="1300" b="0" i="0" u="none" strike="noStrike" cap="none" normalizeH="0" baseline="0">
+                <a:ln>
+                  <a:noFill/>
+                </a:ln>
+                <a:solidFill>
+                  <a:schemeClr val="tx1"/>
+                </a:solidFill>
+                <a:effectLst/>
+                <a:latin typeface="Arial" panose="020B0604020202020204" pitchFamily="34" charset="0"/>
+              </a:rPr>
+              <a:t>məlumatları silmək üçün</a:t>
+            </a:r>
+            <a:r>
+              <a:rPr lang="az-Latn-AZ" altLang="en-US" sz="1300">
+                <a:latin typeface="Arial" panose="020B0604020202020204" pitchFamily="34" charset="0"/>
+              </a:rPr>
+              <a:t> istifadə edilən kodumuzu yazırıq.</a:t>
+            </a:r>
+            <a:endParaRPr kumimoji="0" lang="en-US" altLang="en-US" sz="1300" b="0" i="0" u="none" strike="noStrike" cap="none" normalizeH="0" baseline="0">
+              <a:ln>
+                <a:noFill/>
+              </a:ln>
+              <a:solidFill>
+                <a:schemeClr val="tx1"/>
+              </a:solidFill>
+              <a:effectLst/>
+              <a:latin typeface="Arial" panose="020B0604020202020204" pitchFamily="34" charset="0"/>
+            </a:endParaRPr>
+          </a:p>
+        </p:txBody>
+      </p:sp>
+      <p:pic>
+        <p:nvPicPr>
+          <p:cNvPr id="4" name="Picture 3">
+            <a:extLst>
+              <a:ext uri="{FF2B5EF4-FFF2-40B4-BE49-F238E27FC236}">
+                <a16:creationId xmlns:a16="http://schemas.microsoft.com/office/drawing/2014/main" id="{F708B630-50FA-2D2A-D091-E49755F9B113}"/>
+              </a:ext>
+            </a:extLst>
+          </p:cNvPr>
+          <p:cNvPicPr>
+            <a:picLocks noChangeAspect="1"/>
+          </p:cNvPicPr>
+          <p:nvPr/>
+        </p:nvPicPr>
+        <p:blipFill>
+          <a:blip r:embed="rId2"/>
+          <a:stretch>
+            <a:fillRect/>
+          </a:stretch>
+        </p:blipFill>
+        <p:spPr>
+          <a:xfrm>
+            <a:off x="8192084" y="0"/>
+            <a:ext cx="3999916" cy="6858000"/>
+          </a:xfrm>
+          <a:prstGeom prst="rect">
+            <a:avLst/>
+          </a:prstGeom>
+        </p:spPr>
+      </p:pic>
+      <p:pic>
+        <p:nvPicPr>
+          <p:cNvPr id="6" name="Picture 5">
+            <a:extLst>
+              <a:ext uri="{FF2B5EF4-FFF2-40B4-BE49-F238E27FC236}">
+                <a16:creationId xmlns:a16="http://schemas.microsoft.com/office/drawing/2014/main" id="{B1CE71ED-E1D4-A31C-AC97-3F90DEC18DD2}"/>
+              </a:ext>
+            </a:extLst>
+          </p:cNvPr>
+          <p:cNvPicPr>
+            <a:picLocks noChangeAspect="1"/>
+          </p:cNvPicPr>
+          <p:nvPr/>
+        </p:nvPicPr>
+        <p:blipFill>
+          <a:blip r:embed="rId3"/>
+          <a:stretch>
+            <a:fillRect/>
+          </a:stretch>
+        </p:blipFill>
+        <p:spPr>
+          <a:xfrm>
+            <a:off x="0" y="3388771"/>
+            <a:ext cx="6707642" cy="3469229"/>
+          </a:xfrm>
+          <a:prstGeom prst="rect">
+            <a:avLst/>
+          </a:prstGeom>
+        </p:spPr>
+      </p:pic>
+    </p:spTree>
+    <p:extLst>
+      <p:ext uri="{BB962C8B-B14F-4D97-AF65-F5344CB8AC3E}">
+        <p14:creationId xmlns:p14="http://schemas.microsoft.com/office/powerpoint/2010/main" val="1410520562"/>
+      </p:ext>
+    </p:extLst>
+  </p:cSld>
+  <p:clrMapOvr>
+    <a:masterClrMapping/>
+  </p:clrMapOvr>
+</p:sld>
+</file>
+
+<file path=ppt/slides/slide8.xml><?xml version="1.0" encoding="utf-8"?>
+<p:sld xmlns:a="http://schemas.openxmlformats.org/drawingml/2006/main" xmlns:r="http://schemas.openxmlformats.org/officeDocument/2006/relationships" xmlns:p="http://schemas.openxmlformats.org/presentationml/2006/main">
+  <p:cSld>
+    <p:spTree>
+      <p:nvGrpSpPr>
+        <p:cNvPr id="1" name="">
+          <a:extLst>
+            <a:ext uri="{FF2B5EF4-FFF2-40B4-BE49-F238E27FC236}">
+              <a16:creationId xmlns:a16="http://schemas.microsoft.com/office/drawing/2014/main" id="{F3795C3C-09FC-D943-333E-3DE4B1B2949A}"/>
+            </a:ext>
+          </a:extLst>
+        </p:cNvPr>
+        <p:cNvGrpSpPr/>
+        <p:nvPr/>
+      </p:nvGrpSpPr>
+      <p:grpSpPr>
+        <a:xfrm>
+          <a:off x="0" y="0"/>
+          <a:ext cx="0" cy="0"/>
+          <a:chOff x="0" y="0"/>
+          <a:chExt cx="0" cy="0"/>
+        </a:xfrm>
+      </p:grpSpPr>
+      <p:sp>
+        <p:nvSpPr>
+          <p:cNvPr id="3" name="TextBox 2">
+            <a:extLst>
+              <a:ext uri="{FF2B5EF4-FFF2-40B4-BE49-F238E27FC236}">
+                <a16:creationId xmlns:a16="http://schemas.microsoft.com/office/drawing/2014/main" id="{4C3286A4-ACD0-2899-89B5-C47F270942A6}"/>
+              </a:ext>
+            </a:extLst>
+          </p:cNvPr>
+          <p:cNvSpPr txBox="1"/>
+          <p:nvPr/>
+        </p:nvSpPr>
+        <p:spPr>
+          <a:xfrm>
+            <a:off x="217714" y="55416"/>
+            <a:ext cx="11756571" cy="355354"/>
+          </a:xfrm>
+          <a:prstGeom prst="rect">
+            <a:avLst/>
+          </a:prstGeom>
+          <a:noFill/>
+        </p:spPr>
+        <p:txBody>
+          <a:bodyPr wrap="square">
+            <a:spAutoFit/>
+          </a:bodyPr>
+          <a:lstStyle/>
+          <a:p>
+            <a:pPr>
+              <a:lnSpc>
+                <a:spcPct val="150000"/>
+              </a:lnSpc>
+              <a:buNone/>
+            </a:pPr>
+            <a:r>
+              <a:rPr lang="az-Latn-AZ" altLang="en-US" sz="1300">
+                <a:latin typeface="Arial" panose="020B0604020202020204" pitchFamily="34" charset="0"/>
+              </a:rPr>
+              <a:t>Data silindikdən sonra isə, geriyə </a:t>
+            </a:r>
+            <a:r>
+              <a:rPr lang="az-Latn-AZ" altLang="en-US" sz="1300" b="1">
+                <a:latin typeface="Arial" panose="020B0604020202020204" pitchFamily="34" charset="0"/>
+              </a:rPr>
+              <a:t>status</a:t>
+            </a:r>
+            <a:r>
+              <a:rPr lang="az-Latn-AZ" altLang="en-US" sz="1300">
+                <a:latin typeface="Arial" panose="020B0604020202020204" pitchFamily="34" charset="0"/>
+              </a:rPr>
+              <a:t> və </a:t>
+            </a:r>
+            <a:r>
+              <a:rPr lang="az-Latn-AZ" altLang="en-US" sz="1300" b="1">
+                <a:latin typeface="Arial" panose="020B0604020202020204" pitchFamily="34" charset="0"/>
+              </a:rPr>
+              <a:t>message</a:t>
+            </a:r>
+            <a:r>
+              <a:rPr lang="az-Latn-AZ" altLang="en-US" sz="1300">
+                <a:latin typeface="Arial" panose="020B0604020202020204" pitchFamily="34" charset="0"/>
+              </a:rPr>
+              <a:t> göndəririk.</a:t>
+            </a:r>
+            <a:endParaRPr kumimoji="0" lang="en-US" altLang="en-US" sz="1300" b="0" i="0" u="none" strike="noStrike" cap="none" normalizeH="0" baseline="0">
+              <a:ln>
+                <a:noFill/>
+              </a:ln>
+              <a:solidFill>
+                <a:schemeClr val="tx1"/>
+              </a:solidFill>
+              <a:effectLst/>
+              <a:latin typeface="Arial" panose="020B0604020202020204" pitchFamily="34" charset="0"/>
+            </a:endParaRPr>
+          </a:p>
+        </p:txBody>
+      </p:sp>
+      <p:pic>
+        <p:nvPicPr>
+          <p:cNvPr id="4" name="Picture 3">
+            <a:extLst>
+              <a:ext uri="{FF2B5EF4-FFF2-40B4-BE49-F238E27FC236}">
+                <a16:creationId xmlns:a16="http://schemas.microsoft.com/office/drawing/2014/main" id="{A887E636-9835-9668-EC9D-AEE91778DBED}"/>
+              </a:ext>
+            </a:extLst>
+          </p:cNvPr>
+          <p:cNvPicPr>
+            <a:picLocks noChangeAspect="1"/>
+          </p:cNvPicPr>
+          <p:nvPr/>
+        </p:nvPicPr>
+        <p:blipFill>
+          <a:blip r:embed="rId2"/>
+          <a:stretch>
+            <a:fillRect/>
+          </a:stretch>
+        </p:blipFill>
+        <p:spPr>
+          <a:xfrm>
+            <a:off x="0" y="482843"/>
+            <a:ext cx="12192000" cy="6375157"/>
+          </a:xfrm>
+          <a:prstGeom prst="rect">
+            <a:avLst/>
+          </a:prstGeom>
+        </p:spPr>
+      </p:pic>
+    </p:spTree>
+    <p:extLst>
+      <p:ext uri="{BB962C8B-B14F-4D97-AF65-F5344CB8AC3E}">
+        <p14:creationId xmlns:p14="http://schemas.microsoft.com/office/powerpoint/2010/main" val="4033839159"/>
+      </p:ext>
+    </p:extLst>
+  </p:cSld>
+  <p:clrMapOvr>
+    <a:masterClrMapping/>
+  </p:clrMapOvr>
+</p:sld>
+</file>
+
+<file path=ppt/slides/slide9.xml><?xml version="1.0" encoding="utf-8"?>
+<p:sld xmlns:a="http://schemas.openxmlformats.org/drawingml/2006/main" xmlns:r="http://schemas.openxmlformats.org/officeDocument/2006/relationships" xmlns:p="http://schemas.openxmlformats.org/presentationml/2006/main">
+  <p:cSld>
+    <p:spTree>
+      <p:nvGrpSpPr>
+        <p:cNvPr id="1" name="">
+          <a:extLst>
+            <a:ext uri="{FF2B5EF4-FFF2-40B4-BE49-F238E27FC236}">
+              <a16:creationId xmlns:a16="http://schemas.microsoft.com/office/drawing/2014/main" id="{EA7E9E81-C35E-BD71-F54E-4F77C94E420B}"/>
+            </a:ext>
+          </a:extLst>
+        </p:cNvPr>
+        <p:cNvGrpSpPr/>
+        <p:nvPr/>
+      </p:nvGrpSpPr>
+      <p:grpSpPr>
+        <a:xfrm>
+          <a:off x="0" y="0"/>
+          <a:ext cx="0" cy="0"/>
+          <a:chOff x="0" y="0"/>
+          <a:chExt cx="0" cy="0"/>
+        </a:xfrm>
+      </p:grpSpPr>
+      <p:sp>
+        <p:nvSpPr>
+          <p:cNvPr id="3" name="TextBox 2">
+            <a:extLst>
+              <a:ext uri="{FF2B5EF4-FFF2-40B4-BE49-F238E27FC236}">
+                <a16:creationId xmlns:a16="http://schemas.microsoft.com/office/drawing/2014/main" id="{20444E2B-C38B-E36E-E819-C77230EEADDD}"/>
+              </a:ext>
+            </a:extLst>
+          </p:cNvPr>
+          <p:cNvSpPr txBox="1"/>
+          <p:nvPr/>
+        </p:nvSpPr>
+        <p:spPr>
+          <a:xfrm>
+            <a:off x="217713" y="88792"/>
+            <a:ext cx="11756571" cy="655436"/>
+          </a:xfrm>
+          <a:prstGeom prst="rect">
+            <a:avLst/>
+          </a:prstGeom>
+          <a:noFill/>
+        </p:spPr>
+        <p:txBody>
+          <a:bodyPr wrap="square">
+            <a:spAutoFit/>
+          </a:bodyPr>
+          <a:lstStyle/>
+          <a:p>
+            <a:pPr>
+              <a:lnSpc>
+                <a:spcPct val="150000"/>
+              </a:lnSpc>
+              <a:buNone/>
+            </a:pPr>
+            <a:r>
+              <a:rPr kumimoji="0" lang="az-Latn-AZ" altLang="en-US" sz="1300" b="0" i="0" u="none" strike="noStrike" cap="none" normalizeH="0" baseline="0">
+                <a:ln>
+                  <a:noFill/>
+                </a:ln>
+                <a:solidFill>
+                  <a:schemeClr val="tx1"/>
+                </a:solidFill>
+                <a:effectLst/>
+                <a:latin typeface="Arial" panose="020B0604020202020204" pitchFamily="34" charset="0"/>
+              </a:rPr>
+              <a:t>Əgər </a:t>
+            </a:r>
+            <a:r>
+              <a:rPr kumimoji="0" lang="az-Latn-AZ" altLang="en-US" sz="1300" b="1" i="0" u="none" strike="noStrike" cap="none" normalizeH="0" baseline="0">
+                <a:ln>
+                  <a:noFill/>
+                </a:ln>
+                <a:solidFill>
+                  <a:schemeClr val="tx1"/>
+                </a:solidFill>
+                <a:effectLst/>
+                <a:latin typeface="Arial" panose="020B0604020202020204" pitchFamily="34" charset="0"/>
+              </a:rPr>
+              <a:t>DB</a:t>
+            </a:r>
+            <a:r>
+              <a:rPr kumimoji="0" lang="az-Latn-AZ" altLang="en-US" sz="1300" b="0" i="0" u="none" strike="noStrike" cap="none" normalizeH="0" baseline="0">
+                <a:ln>
+                  <a:noFill/>
+                </a:ln>
+                <a:solidFill>
+                  <a:schemeClr val="tx1"/>
+                </a:solidFill>
+                <a:effectLst/>
+                <a:latin typeface="Arial" panose="020B0604020202020204" pitchFamily="34" charset="0"/>
+              </a:rPr>
+              <a:t> -də, Slider cədvəlində şəkil yoxdursa, </a:t>
+            </a:r>
+            <a:r>
+              <a:rPr kumimoji="0" lang="az-Latn-AZ" altLang="en-US" sz="1300" b="1" i="0" u="none" strike="noStrike" cap="none" normalizeH="0" baseline="0">
+                <a:ln>
+                  <a:noFill/>
+                </a:ln>
+                <a:solidFill>
+                  <a:schemeClr val="tx1"/>
+                </a:solidFill>
+                <a:effectLst/>
+                <a:latin typeface="Arial" panose="020B0604020202020204" pitchFamily="34" charset="0"/>
+              </a:rPr>
+              <a:t>NULL</a:t>
+            </a:r>
+            <a:r>
+              <a:rPr kumimoji="0" lang="az-Latn-AZ" altLang="en-US" sz="1300" b="0" i="0" u="none" strike="noStrike" cap="none" normalizeH="0" baseline="0">
+                <a:ln>
+                  <a:noFill/>
+                </a:ln>
+                <a:solidFill>
+                  <a:schemeClr val="tx1"/>
+                </a:solidFill>
+                <a:effectLst/>
+                <a:latin typeface="Arial" panose="020B0604020202020204" pitchFamily="34" charset="0"/>
+              </a:rPr>
+              <a:t> varsa, onda </a:t>
+            </a:r>
+            <a:r>
+              <a:rPr kumimoji="0" lang="az-Latn-AZ" altLang="en-US" sz="1300" b="1" i="0" u="none" strike="noStrike" cap="none" normalizeH="0" baseline="0">
+                <a:ln>
+                  <a:noFill/>
+                </a:ln>
+                <a:solidFill>
+                  <a:schemeClr val="tx1"/>
+                </a:solidFill>
+                <a:effectLst/>
+                <a:latin typeface="Arial" panose="020B0604020202020204" pitchFamily="34" charset="0"/>
+              </a:rPr>
+              <a:t>delete</a:t>
+            </a:r>
+            <a:r>
+              <a:rPr kumimoji="0" lang="en-US" altLang="en-US" sz="1300" b="1" i="0" u="none" strike="noStrike" cap="none" normalizeH="0" baseline="0">
+                <a:ln>
+                  <a:noFill/>
+                </a:ln>
+                <a:solidFill>
+                  <a:schemeClr val="tx1"/>
+                </a:solidFill>
+                <a:effectLst/>
+                <a:latin typeface="Arial" panose="020B0604020202020204" pitchFamily="34" charset="0"/>
+              </a:rPr>
+              <a:t>I</a:t>
+            </a:r>
+            <a:r>
+              <a:rPr lang="az-Latn-AZ" altLang="en-US" sz="1300" b="1">
+                <a:latin typeface="Arial" panose="020B0604020202020204" pitchFamily="34" charset="0"/>
+              </a:rPr>
+              <a:t>mage(string $path)</a:t>
+            </a:r>
+            <a:r>
+              <a:rPr kumimoji="0" lang="en-US" altLang="en-US" sz="1300" b="1" i="0" u="none" strike="noStrike" cap="none" normalizeH="0" baseline="0">
+                <a:ln>
+                  <a:noFill/>
+                </a:ln>
+                <a:solidFill>
+                  <a:schemeClr val="tx1"/>
+                </a:solidFill>
+                <a:effectLst/>
+                <a:latin typeface="Arial" panose="020B0604020202020204" pitchFamily="34" charset="0"/>
+              </a:rPr>
+              <a:t> </a:t>
+            </a:r>
+            <a:r>
+              <a:rPr kumimoji="0" lang="az-Latn-AZ" altLang="en-US" sz="1300" b="0" i="0" u="none" strike="noStrike" cap="none" normalizeH="0" baseline="0">
+                <a:ln>
+                  <a:noFill/>
+                </a:ln>
+                <a:solidFill>
+                  <a:schemeClr val="tx1"/>
+                </a:solidFill>
+                <a:effectLst/>
+                <a:latin typeface="Arial" panose="020B0604020202020204" pitchFamily="34" charset="0"/>
+              </a:rPr>
+              <a:t>metoduna </a:t>
+            </a:r>
+            <a:r>
+              <a:rPr kumimoji="0" lang="az-Latn-AZ" altLang="en-US" sz="1300" b="1" i="0" u="none" strike="noStrike" cap="none" normalizeH="0" baseline="0">
+                <a:ln>
+                  <a:noFill/>
+                </a:ln>
+                <a:solidFill>
+                  <a:schemeClr val="tx1"/>
+                </a:solidFill>
+                <a:effectLst/>
+                <a:latin typeface="Arial" panose="020B0604020202020204" pitchFamily="34" charset="0"/>
+              </a:rPr>
+              <a:t>NULL</a:t>
+            </a:r>
+            <a:r>
+              <a:rPr lang="az-Latn-AZ" altLang="en-US" sz="1300">
+                <a:latin typeface="Arial" panose="020B0604020202020204" pitchFamily="34" charset="0"/>
+              </a:rPr>
+              <a:t> göndərmiş oluruq. </a:t>
+            </a:r>
+            <a:r>
+              <a:rPr lang="az-Latn-AZ" altLang="en-US" sz="1300" b="1">
+                <a:latin typeface="Arial" panose="020B0604020202020204" pitchFamily="34" charset="0"/>
+              </a:rPr>
+              <a:t>$path </a:t>
+            </a:r>
+            <a:r>
+              <a:rPr lang="az-Latn-AZ" altLang="en-US" sz="1300">
+                <a:latin typeface="Arial" panose="020B0604020202020204" pitchFamily="34" charset="0"/>
+              </a:rPr>
+              <a:t>dəyişəninin </a:t>
+            </a:r>
+            <a:r>
+              <a:rPr lang="az-Latn-AZ" altLang="en-US" sz="1300" b="1">
+                <a:latin typeface="Arial" panose="020B0604020202020204" pitchFamily="34" charset="0"/>
+              </a:rPr>
+              <a:t>null</a:t>
+            </a:r>
+            <a:r>
+              <a:rPr lang="az-Latn-AZ" altLang="en-US" sz="1300">
+                <a:latin typeface="Arial" panose="020B0604020202020204" pitchFamily="34" charset="0"/>
+              </a:rPr>
+              <a:t> olması səbəbindən isə aşağıdakı kimi xəta gəlir.</a:t>
+            </a:r>
+            <a:endParaRPr kumimoji="0" lang="en-US" altLang="en-US" sz="1300" b="0" i="0" u="none" strike="noStrike" cap="none" normalizeH="0" baseline="0">
+              <a:ln>
+                <a:noFill/>
+              </a:ln>
+              <a:solidFill>
+                <a:schemeClr val="tx1"/>
+              </a:solidFill>
+              <a:effectLst/>
+              <a:latin typeface="Arial" panose="020B0604020202020204" pitchFamily="34" charset="0"/>
+            </a:endParaRPr>
+          </a:p>
+        </p:txBody>
+      </p:sp>
+      <p:pic>
+        <p:nvPicPr>
+          <p:cNvPr id="4" name="Picture 3">
+            <a:extLst>
+              <a:ext uri="{FF2B5EF4-FFF2-40B4-BE49-F238E27FC236}">
+                <a16:creationId xmlns:a16="http://schemas.microsoft.com/office/drawing/2014/main" id="{0B2EC040-B3E9-2922-0DAD-42451F267A8B}"/>
+              </a:ext>
+            </a:extLst>
+          </p:cNvPr>
+          <p:cNvPicPr>
+            <a:picLocks noChangeAspect="1"/>
+          </p:cNvPicPr>
+          <p:nvPr/>
+        </p:nvPicPr>
+        <p:blipFill>
+          <a:blip r:embed="rId2"/>
+          <a:stretch>
+            <a:fillRect/>
+          </a:stretch>
+        </p:blipFill>
+        <p:spPr>
+          <a:xfrm>
+            <a:off x="-1" y="866829"/>
+            <a:ext cx="12192000" cy="5991171"/>
+          </a:xfrm>
+          <a:prstGeom prst="rect">
+            <a:avLst/>
+          </a:prstGeom>
+        </p:spPr>
+      </p:pic>
+    </p:spTree>
+    <p:extLst>
+      <p:ext uri="{BB962C8B-B14F-4D97-AF65-F5344CB8AC3E}">
+        <p14:creationId xmlns:p14="http://schemas.microsoft.com/office/powerpoint/2010/main" val="1844523818"/>
       </p:ext>
     </p:extLst>
   </p:cSld>

--- a/.lessons/54 Slider Features/9 Slider- Delete slider feature/1.pptx
+++ b/.lessons/54 Slider Features/9 Slider- Delete slider feature/1.pptx
@@ -4367,7 +4367,7 @@
         <p:spPr>
           <a:xfrm>
             <a:off x="217714" y="255046"/>
-            <a:ext cx="11756571" cy="355354"/>
+            <a:ext cx="2192977" cy="955518"/>
           </a:xfrm>
           <a:prstGeom prst="rect">
             <a:avLst/>
@@ -4387,21 +4387,54 @@
               <a:buNone/>
             </a:pPr>
             <a:r>
-              <a:rPr kumimoji="0" lang="en-US" altLang="en-US" sz="1300" b="0" i="0" u="none" strike="noStrike" cap="none" normalizeH="0" baseline="0">
-                <a:ln>
-                  <a:noFill/>
-                </a:ln>
-                <a:solidFill>
-                  <a:schemeClr val="tx1"/>
-                </a:solidFill>
-                <a:effectLst/>
-                <a:latin typeface="Arial" panose="020B0604020202020204" pitchFamily="34" charset="0"/>
-              </a:rPr>
-              <a:t>.</a:t>
-            </a:r>
-          </a:p>
-        </p:txBody>
-      </p:sp>
+              <a:rPr lang="az-Latn-AZ" altLang="en-US" sz="1300">
+                <a:latin typeface="Arial" panose="020B0604020202020204" pitchFamily="34" charset="0"/>
+              </a:rPr>
+              <a:t>Şəkillərin düzgün ölçüdə sığması üçün bir balaca stil əlavə edirik.</a:t>
+            </a:r>
+            <a:endParaRPr kumimoji="0" lang="en-US" altLang="en-US" sz="1300" b="0" i="0" u="none" strike="noStrike" cap="none" normalizeH="0" baseline="0">
+              <a:ln>
+                <a:noFill/>
+              </a:ln>
+              <a:solidFill>
+                <a:schemeClr val="tx1"/>
+              </a:solidFill>
+              <a:effectLst/>
+              <a:latin typeface="Arial" panose="020B0604020202020204" pitchFamily="34" charset="0"/>
+            </a:endParaRPr>
+          </a:p>
+        </p:txBody>
+      </p:sp>
+      <p:pic>
+        <p:nvPicPr>
+          <p:cNvPr id="4" name="Picture 3">
+            <a:extLst>
+              <a:ext uri="{FF2B5EF4-FFF2-40B4-BE49-F238E27FC236}">
+                <a16:creationId xmlns:a16="http://schemas.microsoft.com/office/drawing/2014/main" id="{DDD7506C-593C-A301-28FA-3007C9FA2FC6}"/>
+              </a:ext>
+            </a:extLst>
+          </p:cNvPr>
+          <p:cNvPicPr>
+            <a:picLocks noChangeAspect="1"/>
+          </p:cNvPicPr>
+          <p:nvPr/>
+        </p:nvPicPr>
+        <p:blipFill>
+          <a:blip r:embed="rId2"/>
+          <a:stretch>
+            <a:fillRect/>
+          </a:stretch>
+        </p:blipFill>
+        <p:spPr>
+          <a:xfrm>
+            <a:off x="2767424" y="0"/>
+            <a:ext cx="9424576" cy="6858000"/>
+          </a:xfrm>
+          <a:prstGeom prst="rect">
+            <a:avLst/>
+          </a:prstGeom>
+        </p:spPr>
+      </p:pic>
     </p:spTree>
     <p:extLst>
       <p:ext uri="{BB962C8B-B14F-4D97-AF65-F5344CB8AC3E}">
